--- a/Midterm_Polars/Polar_PythonLibrary.pptx
+++ b/Midterm_Polars/Polar_PythonLibrary.pptx
@@ -4,16 +4,21 @@
   <p:sldMasterIdLst>
     <p:sldMasterId id="2147483648" r:id="rId1"/>
   </p:sldMasterIdLst>
+  <p:notesMasterIdLst>
+    <p:notesMasterId r:id="rId13"/>
+  </p:notesMasterIdLst>
   <p:sldIdLst>
     <p:sldId id="256" r:id="rId2"/>
     <p:sldId id="258" r:id="rId3"/>
     <p:sldId id="260" r:id="rId4"/>
-    <p:sldId id="259" r:id="rId5"/>
-    <p:sldId id="257" r:id="rId6"/>
-    <p:sldId id="261" r:id="rId7"/>
-    <p:sldId id="262" r:id="rId8"/>
-    <p:sldId id="263" r:id="rId9"/>
-    <p:sldId id="264" r:id="rId10"/>
+    <p:sldId id="265" r:id="rId5"/>
+    <p:sldId id="267" r:id="rId6"/>
+    <p:sldId id="257" r:id="rId7"/>
+    <p:sldId id="261" r:id="rId8"/>
+    <p:sldId id="266" r:id="rId9"/>
+    <p:sldId id="262" r:id="rId10"/>
+    <p:sldId id="264" r:id="rId11"/>
+    <p:sldId id="263" r:id="rId12"/>
   </p:sldIdLst>
   <p:sldSz cx="12192000" cy="6858000"/>
   <p:notesSz cx="6858000" cy="9144000"/>
@@ -120,6 +125,439 @@
 </p:presentation>
 </file>
 
+<file path=ppt/notesMasters/notesMaster1.xml><?xml version="1.0" encoding="utf-8"?>
+<p:notesMaster xmlns:a="http://schemas.openxmlformats.org/drawingml/2006/main" xmlns:r="http://schemas.openxmlformats.org/officeDocument/2006/relationships" xmlns:p="http://schemas.openxmlformats.org/presentationml/2006/main">
+  <p:cSld>
+    <p:bg>
+      <p:bgRef idx="1001">
+        <a:schemeClr val="bg1"/>
+      </p:bgRef>
+    </p:bg>
+    <p:spTree>
+      <p:nvGrpSpPr>
+        <p:cNvPr id="1" name=""/>
+        <p:cNvGrpSpPr/>
+        <p:nvPr/>
+      </p:nvGrpSpPr>
+      <p:grpSpPr>
+        <a:xfrm>
+          <a:off x="0" y="0"/>
+          <a:ext cx="0" cy="0"/>
+          <a:chOff x="0" y="0"/>
+          <a:chExt cx="0" cy="0"/>
+        </a:xfrm>
+      </p:grpSpPr>
+      <p:sp>
+        <p:nvSpPr>
+          <p:cNvPr id="2" name="Header Placeholder 1"/>
+          <p:cNvSpPr>
+            <a:spLocks noGrp="1"/>
+          </p:cNvSpPr>
+          <p:nvPr>
+            <p:ph type="hdr" sz="quarter"/>
+          </p:nvPr>
+        </p:nvSpPr>
+        <p:spPr>
+          <a:xfrm>
+            <a:off x="0" y="0"/>
+            <a:ext cx="2971800" cy="458788"/>
+          </a:xfrm>
+          <a:prstGeom prst="rect">
+            <a:avLst/>
+          </a:prstGeom>
+        </p:spPr>
+        <p:txBody>
+          <a:bodyPr vert="horz" lIns="91440" tIns="45720" rIns="91440" bIns="45720" rtlCol="0"/>
+          <a:lstStyle>
+            <a:lvl1pPr algn="l">
+              <a:defRPr sz="1200"/>
+            </a:lvl1pPr>
+          </a:lstStyle>
+          <a:p>
+            <a:endParaRPr lang="en-US"/>
+          </a:p>
+        </p:txBody>
+      </p:sp>
+      <p:sp>
+        <p:nvSpPr>
+          <p:cNvPr id="3" name="Date Placeholder 2"/>
+          <p:cNvSpPr>
+            <a:spLocks noGrp="1"/>
+          </p:cNvSpPr>
+          <p:nvPr>
+            <p:ph type="dt" idx="1"/>
+          </p:nvPr>
+        </p:nvSpPr>
+        <p:spPr>
+          <a:xfrm>
+            <a:off x="3884613" y="0"/>
+            <a:ext cx="2971800" cy="458788"/>
+          </a:xfrm>
+          <a:prstGeom prst="rect">
+            <a:avLst/>
+          </a:prstGeom>
+        </p:spPr>
+        <p:txBody>
+          <a:bodyPr vert="horz" lIns="91440" tIns="45720" rIns="91440" bIns="45720" rtlCol="0"/>
+          <a:lstStyle>
+            <a:lvl1pPr algn="r">
+              <a:defRPr sz="1200"/>
+            </a:lvl1pPr>
+          </a:lstStyle>
+          <a:p>
+            <a:fld id="{14F198E4-4FE1-4299-9EAA-883A4D43344E}" type="datetimeFigureOut">
+              <a:rPr lang="en-US" smtClean="0"/>
+              <a:t>4/29/2025</a:t>
+            </a:fld>
+            <a:endParaRPr lang="en-US"/>
+          </a:p>
+        </p:txBody>
+      </p:sp>
+      <p:sp>
+        <p:nvSpPr>
+          <p:cNvPr id="4" name="Slide Image Placeholder 3"/>
+          <p:cNvSpPr>
+            <a:spLocks noGrp="1" noRot="1" noChangeAspect="1"/>
+          </p:cNvSpPr>
+          <p:nvPr>
+            <p:ph type="sldImg" idx="2"/>
+          </p:nvPr>
+        </p:nvSpPr>
+        <p:spPr>
+          <a:xfrm>
+            <a:off x="685800" y="1143000"/>
+            <a:ext cx="5486400" cy="3086100"/>
+          </a:xfrm>
+          <a:prstGeom prst="rect">
+            <a:avLst/>
+          </a:prstGeom>
+          <a:noFill/>
+          <a:ln w="12700">
+            <a:solidFill>
+              <a:prstClr val="black"/>
+            </a:solidFill>
+          </a:ln>
+        </p:spPr>
+        <p:txBody>
+          <a:bodyPr vert="horz" lIns="91440" tIns="45720" rIns="91440" bIns="45720" rtlCol="0" anchor="ctr"/>
+          <a:lstStyle/>
+          <a:p>
+            <a:endParaRPr lang="en-US"/>
+          </a:p>
+        </p:txBody>
+      </p:sp>
+      <p:sp>
+        <p:nvSpPr>
+          <p:cNvPr id="5" name="Notes Placeholder 4"/>
+          <p:cNvSpPr>
+            <a:spLocks noGrp="1"/>
+          </p:cNvSpPr>
+          <p:nvPr>
+            <p:ph type="body" sz="quarter" idx="3"/>
+          </p:nvPr>
+        </p:nvSpPr>
+        <p:spPr>
+          <a:xfrm>
+            <a:off x="685800" y="4400550"/>
+            <a:ext cx="5486400" cy="3600450"/>
+          </a:xfrm>
+          <a:prstGeom prst="rect">
+            <a:avLst/>
+          </a:prstGeom>
+        </p:spPr>
+        <p:txBody>
+          <a:bodyPr vert="horz" lIns="91440" tIns="45720" rIns="91440" bIns="45720" rtlCol="0"/>
+          <a:lstStyle/>
+          <a:p>
+            <a:pPr lvl="0"/>
+            <a:r>
+              <a:rPr lang="en-US"/>
+              <a:t>Click to edit Master text styles</a:t>
+            </a:r>
+          </a:p>
+          <a:p>
+            <a:pPr lvl="1"/>
+            <a:r>
+              <a:rPr lang="en-US"/>
+              <a:t>Second level</a:t>
+            </a:r>
+          </a:p>
+          <a:p>
+            <a:pPr lvl="2"/>
+            <a:r>
+              <a:rPr lang="en-US"/>
+              <a:t>Third level</a:t>
+            </a:r>
+          </a:p>
+          <a:p>
+            <a:pPr lvl="3"/>
+            <a:r>
+              <a:rPr lang="en-US"/>
+              <a:t>Fourth level</a:t>
+            </a:r>
+          </a:p>
+          <a:p>
+            <a:pPr lvl="4"/>
+            <a:r>
+              <a:rPr lang="en-US"/>
+              <a:t>Fifth level</a:t>
+            </a:r>
+          </a:p>
+        </p:txBody>
+      </p:sp>
+      <p:sp>
+        <p:nvSpPr>
+          <p:cNvPr id="6" name="Footer Placeholder 5"/>
+          <p:cNvSpPr>
+            <a:spLocks noGrp="1"/>
+          </p:cNvSpPr>
+          <p:nvPr>
+            <p:ph type="ftr" sz="quarter" idx="4"/>
+          </p:nvPr>
+        </p:nvSpPr>
+        <p:spPr>
+          <a:xfrm>
+            <a:off x="0" y="8685213"/>
+            <a:ext cx="2971800" cy="458787"/>
+          </a:xfrm>
+          <a:prstGeom prst="rect">
+            <a:avLst/>
+          </a:prstGeom>
+        </p:spPr>
+        <p:txBody>
+          <a:bodyPr vert="horz" lIns="91440" tIns="45720" rIns="91440" bIns="45720" rtlCol="0" anchor="b"/>
+          <a:lstStyle>
+            <a:lvl1pPr algn="l">
+              <a:defRPr sz="1200"/>
+            </a:lvl1pPr>
+          </a:lstStyle>
+          <a:p>
+            <a:endParaRPr lang="en-US"/>
+          </a:p>
+        </p:txBody>
+      </p:sp>
+      <p:sp>
+        <p:nvSpPr>
+          <p:cNvPr id="7" name="Slide Number Placeholder 6"/>
+          <p:cNvSpPr>
+            <a:spLocks noGrp="1"/>
+          </p:cNvSpPr>
+          <p:nvPr>
+            <p:ph type="sldNum" sz="quarter" idx="5"/>
+          </p:nvPr>
+        </p:nvSpPr>
+        <p:spPr>
+          <a:xfrm>
+            <a:off x="3884613" y="8685213"/>
+            <a:ext cx="2971800" cy="458787"/>
+          </a:xfrm>
+          <a:prstGeom prst="rect">
+            <a:avLst/>
+          </a:prstGeom>
+        </p:spPr>
+        <p:txBody>
+          <a:bodyPr vert="horz" lIns="91440" tIns="45720" rIns="91440" bIns="45720" rtlCol="0" anchor="b"/>
+          <a:lstStyle>
+            <a:lvl1pPr algn="r">
+              <a:defRPr sz="1200"/>
+            </a:lvl1pPr>
+          </a:lstStyle>
+          <a:p>
+            <a:fld id="{AD707E89-EB86-46B8-90F2-6D348B71748F}" type="slidenum">
+              <a:rPr lang="en-US" smtClean="0"/>
+              <a:t>‹#›</a:t>
+            </a:fld>
+            <a:endParaRPr lang="en-US"/>
+          </a:p>
+        </p:txBody>
+      </p:sp>
+    </p:spTree>
+    <p:extLst>
+      <p:ext uri="{BB962C8B-B14F-4D97-AF65-F5344CB8AC3E}">
+        <p14:creationId xmlns:p14="http://schemas.microsoft.com/office/powerpoint/2010/main" val="2380638975"/>
+      </p:ext>
+    </p:extLst>
+  </p:cSld>
+  <p:clrMap bg1="lt1" tx1="dk1" bg2="lt2" tx2="dk2" accent1="accent1" accent2="accent2" accent3="accent3" accent4="accent4" accent5="accent5" accent6="accent6" hlink="hlink" folHlink="folHlink"/>
+  <p:notesStyle>
+    <a:lvl1pPr marL="0" algn="l" defTabSz="914400" rtl="0" eaLnBrk="1" latinLnBrk="0" hangingPunct="1">
+      <a:defRPr sz="1200" kern="1200">
+        <a:solidFill>
+          <a:schemeClr val="tx1"/>
+        </a:solidFill>
+        <a:latin typeface="+mn-lt"/>
+        <a:ea typeface="+mn-ea"/>
+        <a:cs typeface="+mn-cs"/>
+      </a:defRPr>
+    </a:lvl1pPr>
+    <a:lvl2pPr marL="457200" algn="l" defTabSz="914400" rtl="0" eaLnBrk="1" latinLnBrk="0" hangingPunct="1">
+      <a:defRPr sz="1200" kern="1200">
+        <a:solidFill>
+          <a:schemeClr val="tx1"/>
+        </a:solidFill>
+        <a:latin typeface="+mn-lt"/>
+        <a:ea typeface="+mn-ea"/>
+        <a:cs typeface="+mn-cs"/>
+      </a:defRPr>
+    </a:lvl2pPr>
+    <a:lvl3pPr marL="914400" algn="l" defTabSz="914400" rtl="0" eaLnBrk="1" latinLnBrk="0" hangingPunct="1">
+      <a:defRPr sz="1200" kern="1200">
+        <a:solidFill>
+          <a:schemeClr val="tx1"/>
+        </a:solidFill>
+        <a:latin typeface="+mn-lt"/>
+        <a:ea typeface="+mn-ea"/>
+        <a:cs typeface="+mn-cs"/>
+      </a:defRPr>
+    </a:lvl3pPr>
+    <a:lvl4pPr marL="1371600" algn="l" defTabSz="914400" rtl="0" eaLnBrk="1" latinLnBrk="0" hangingPunct="1">
+      <a:defRPr sz="1200" kern="1200">
+        <a:solidFill>
+          <a:schemeClr val="tx1"/>
+        </a:solidFill>
+        <a:latin typeface="+mn-lt"/>
+        <a:ea typeface="+mn-ea"/>
+        <a:cs typeface="+mn-cs"/>
+      </a:defRPr>
+    </a:lvl4pPr>
+    <a:lvl5pPr marL="1828800" algn="l" defTabSz="914400" rtl="0" eaLnBrk="1" latinLnBrk="0" hangingPunct="1">
+      <a:defRPr sz="1200" kern="1200">
+        <a:solidFill>
+          <a:schemeClr val="tx1"/>
+        </a:solidFill>
+        <a:latin typeface="+mn-lt"/>
+        <a:ea typeface="+mn-ea"/>
+        <a:cs typeface="+mn-cs"/>
+      </a:defRPr>
+    </a:lvl5pPr>
+    <a:lvl6pPr marL="2286000" algn="l" defTabSz="914400" rtl="0" eaLnBrk="1" latinLnBrk="0" hangingPunct="1">
+      <a:defRPr sz="1200" kern="1200">
+        <a:solidFill>
+          <a:schemeClr val="tx1"/>
+        </a:solidFill>
+        <a:latin typeface="+mn-lt"/>
+        <a:ea typeface="+mn-ea"/>
+        <a:cs typeface="+mn-cs"/>
+      </a:defRPr>
+    </a:lvl6pPr>
+    <a:lvl7pPr marL="2743200" algn="l" defTabSz="914400" rtl="0" eaLnBrk="1" latinLnBrk="0" hangingPunct="1">
+      <a:defRPr sz="1200" kern="1200">
+        <a:solidFill>
+          <a:schemeClr val="tx1"/>
+        </a:solidFill>
+        <a:latin typeface="+mn-lt"/>
+        <a:ea typeface="+mn-ea"/>
+        <a:cs typeface="+mn-cs"/>
+      </a:defRPr>
+    </a:lvl7pPr>
+    <a:lvl8pPr marL="3200400" algn="l" defTabSz="914400" rtl="0" eaLnBrk="1" latinLnBrk="0" hangingPunct="1">
+      <a:defRPr sz="1200" kern="1200">
+        <a:solidFill>
+          <a:schemeClr val="tx1"/>
+        </a:solidFill>
+        <a:latin typeface="+mn-lt"/>
+        <a:ea typeface="+mn-ea"/>
+        <a:cs typeface="+mn-cs"/>
+      </a:defRPr>
+    </a:lvl8pPr>
+    <a:lvl9pPr marL="3657600" algn="l" defTabSz="914400" rtl="0" eaLnBrk="1" latinLnBrk="0" hangingPunct="1">
+      <a:defRPr sz="1200" kern="1200">
+        <a:solidFill>
+          <a:schemeClr val="tx1"/>
+        </a:solidFill>
+        <a:latin typeface="+mn-lt"/>
+        <a:ea typeface="+mn-ea"/>
+        <a:cs typeface="+mn-cs"/>
+      </a:defRPr>
+    </a:lvl9pPr>
+  </p:notesStyle>
+</p:notesMaster>
+</file>
+
+<file path=ppt/notesSlides/notesSlide1.xml><?xml version="1.0" encoding="utf-8"?>
+<p:notes xmlns:a="http://schemas.openxmlformats.org/drawingml/2006/main" xmlns:r="http://schemas.openxmlformats.org/officeDocument/2006/relationships" xmlns:p="http://schemas.openxmlformats.org/presentationml/2006/main">
+  <p:cSld>
+    <p:spTree>
+      <p:nvGrpSpPr>
+        <p:cNvPr id="1" name=""/>
+        <p:cNvGrpSpPr/>
+        <p:nvPr/>
+      </p:nvGrpSpPr>
+      <p:grpSpPr>
+        <a:xfrm>
+          <a:off x="0" y="0"/>
+          <a:ext cx="0" cy="0"/>
+          <a:chOff x="0" y="0"/>
+          <a:chExt cx="0" cy="0"/>
+        </a:xfrm>
+      </p:grpSpPr>
+      <p:sp>
+        <p:nvSpPr>
+          <p:cNvPr id="2" name="Slide Image Placeholder 1"/>
+          <p:cNvSpPr>
+            <a:spLocks noGrp="1" noRot="1" noChangeAspect="1"/>
+          </p:cNvSpPr>
+          <p:nvPr>
+            <p:ph type="sldImg"/>
+          </p:nvPr>
+        </p:nvSpPr>
+        <p:spPr/>
+      </p:sp>
+      <p:sp>
+        <p:nvSpPr>
+          <p:cNvPr id="3" name="Notes Placeholder 2"/>
+          <p:cNvSpPr>
+            <a:spLocks noGrp="1"/>
+          </p:cNvSpPr>
+          <p:nvPr>
+            <p:ph type="body" idx="1"/>
+          </p:nvPr>
+        </p:nvSpPr>
+        <p:spPr/>
+        <p:txBody>
+          <a:bodyPr/>
+          <a:lstStyle/>
+          <a:p>
+            <a:endParaRPr lang="en-US" dirty="0"/>
+          </a:p>
+        </p:txBody>
+      </p:sp>
+      <p:sp>
+        <p:nvSpPr>
+          <p:cNvPr id="4" name="Slide Number Placeholder 3"/>
+          <p:cNvSpPr>
+            <a:spLocks noGrp="1"/>
+          </p:cNvSpPr>
+          <p:nvPr>
+            <p:ph type="sldNum" sz="quarter" idx="5"/>
+          </p:nvPr>
+        </p:nvSpPr>
+        <p:spPr/>
+        <p:txBody>
+          <a:bodyPr/>
+          <a:lstStyle/>
+          <a:p>
+            <a:fld id="{AD707E89-EB86-46B8-90F2-6D348B71748F}" type="slidenum">
+              <a:rPr lang="en-US" smtClean="0"/>
+              <a:t>7</a:t>
+            </a:fld>
+            <a:endParaRPr lang="en-US"/>
+          </a:p>
+        </p:txBody>
+      </p:sp>
+    </p:spTree>
+    <p:extLst>
+      <p:ext uri="{BB962C8B-B14F-4D97-AF65-F5344CB8AC3E}">
+        <p14:creationId xmlns:p14="http://schemas.microsoft.com/office/powerpoint/2010/main" val="281290245"/>
+      </p:ext>
+    </p:extLst>
+  </p:cSld>
+  <p:clrMapOvr>
+    <a:masterClrMapping/>
+  </p:clrMapOvr>
+</p:notes>
+</file>
+
 <file path=ppt/slideLayouts/slideLayout1.xml><?xml version="1.0" encoding="utf-8"?>
 <p:sldLayout xmlns:a="http://schemas.openxmlformats.org/drawingml/2006/main" xmlns:r="http://schemas.openxmlformats.org/officeDocument/2006/relationships" xmlns:p="http://schemas.openxmlformats.org/presentationml/2006/main" type="title" preserve="1">
   <p:cSld name="Title Slide">
@@ -267,7 +705,7 @@
           <a:p>
             <a:fld id="{3EF67818-C18B-46F0-AF65-0CF89B93B556}" type="datetimeFigureOut">
               <a:rPr lang="en-US" smtClean="0"/>
-              <a:t>4/2/2025</a:t>
+              <a:t>4/29/2025</a:t>
             </a:fld>
             <a:endParaRPr lang="en-US"/>
           </a:p>
@@ -465,7 +903,7 @@
           <a:p>
             <a:fld id="{3EF67818-C18B-46F0-AF65-0CF89B93B556}" type="datetimeFigureOut">
               <a:rPr lang="en-US" smtClean="0"/>
-              <a:t>4/2/2025</a:t>
+              <a:t>4/29/2025</a:t>
             </a:fld>
             <a:endParaRPr lang="en-US"/>
           </a:p>
@@ -673,7 +1111,7 @@
           <a:p>
             <a:fld id="{3EF67818-C18B-46F0-AF65-0CF89B93B556}" type="datetimeFigureOut">
               <a:rPr lang="en-US" smtClean="0"/>
-              <a:t>4/2/2025</a:t>
+              <a:t>4/29/2025</a:t>
             </a:fld>
             <a:endParaRPr lang="en-US"/>
           </a:p>
@@ -871,7 +1309,7 @@
           <a:p>
             <a:fld id="{3EF67818-C18B-46F0-AF65-0CF89B93B556}" type="datetimeFigureOut">
               <a:rPr lang="en-US" smtClean="0"/>
-              <a:t>4/2/2025</a:t>
+              <a:t>4/29/2025</a:t>
             </a:fld>
             <a:endParaRPr lang="en-US"/>
           </a:p>
@@ -1146,7 +1584,7 @@
           <a:p>
             <a:fld id="{3EF67818-C18B-46F0-AF65-0CF89B93B556}" type="datetimeFigureOut">
               <a:rPr lang="en-US" smtClean="0"/>
-              <a:t>4/2/2025</a:t>
+              <a:t>4/29/2025</a:t>
             </a:fld>
             <a:endParaRPr lang="en-US"/>
           </a:p>
@@ -1411,7 +1849,7 @@
           <a:p>
             <a:fld id="{3EF67818-C18B-46F0-AF65-0CF89B93B556}" type="datetimeFigureOut">
               <a:rPr lang="en-US" smtClean="0"/>
-              <a:t>4/2/2025</a:t>
+              <a:t>4/29/2025</a:t>
             </a:fld>
             <a:endParaRPr lang="en-US"/>
           </a:p>
@@ -1823,7 +2261,7 @@
           <a:p>
             <a:fld id="{3EF67818-C18B-46F0-AF65-0CF89B93B556}" type="datetimeFigureOut">
               <a:rPr lang="en-US" smtClean="0"/>
-              <a:t>4/2/2025</a:t>
+              <a:t>4/29/2025</a:t>
             </a:fld>
             <a:endParaRPr lang="en-US"/>
           </a:p>
@@ -1964,7 +2402,7 @@
           <a:p>
             <a:fld id="{3EF67818-C18B-46F0-AF65-0CF89B93B556}" type="datetimeFigureOut">
               <a:rPr lang="en-US" smtClean="0"/>
-              <a:t>4/2/2025</a:t>
+              <a:t>4/29/2025</a:t>
             </a:fld>
             <a:endParaRPr lang="en-US"/>
           </a:p>
@@ -2077,7 +2515,7 @@
           <a:p>
             <a:fld id="{3EF67818-C18B-46F0-AF65-0CF89B93B556}" type="datetimeFigureOut">
               <a:rPr lang="en-US" smtClean="0"/>
-              <a:t>4/2/2025</a:t>
+              <a:t>4/29/2025</a:t>
             </a:fld>
             <a:endParaRPr lang="en-US"/>
           </a:p>
@@ -2388,7 +2826,7 @@
           <a:p>
             <a:fld id="{3EF67818-C18B-46F0-AF65-0CF89B93B556}" type="datetimeFigureOut">
               <a:rPr lang="en-US" smtClean="0"/>
-              <a:t>4/2/2025</a:t>
+              <a:t>4/29/2025</a:t>
             </a:fld>
             <a:endParaRPr lang="en-US"/>
           </a:p>
@@ -2676,7 +3114,7 @@
           <a:p>
             <a:fld id="{3EF67818-C18B-46F0-AF65-0CF89B93B556}" type="datetimeFigureOut">
               <a:rPr lang="en-US" smtClean="0"/>
-              <a:t>4/2/2025</a:t>
+              <a:t>4/29/2025</a:t>
             </a:fld>
             <a:endParaRPr lang="en-US"/>
           </a:p>
@@ -2983,7 +3421,7 @@
           <a:p>
             <a:fld id="{3EF67818-C18B-46F0-AF65-0CF89B93B556}" type="datetimeFigureOut">
               <a:rPr lang="en-US" smtClean="0"/>
-              <a:t>4/2/2025</a:t>
+              <a:t>4/29/2025</a:t>
             </a:fld>
             <a:endParaRPr lang="en-US"/>
           </a:p>
@@ -3542,6 +3980,414 @@
 </p:sld>
 </file>
 
+<file path=ppt/slides/slide10.xml><?xml version="1.0" encoding="utf-8"?>
+<p:sld xmlns:a="http://schemas.openxmlformats.org/drawingml/2006/main" xmlns:r="http://schemas.openxmlformats.org/officeDocument/2006/relationships" xmlns:p="http://schemas.openxmlformats.org/presentationml/2006/main">
+  <p:cSld>
+    <p:spTree>
+      <p:nvGrpSpPr>
+        <p:cNvPr id="1" name=""/>
+        <p:cNvGrpSpPr/>
+        <p:nvPr/>
+      </p:nvGrpSpPr>
+      <p:grpSpPr>
+        <a:xfrm>
+          <a:off x="0" y="0"/>
+          <a:ext cx="0" cy="0"/>
+          <a:chOff x="0" y="0"/>
+          <a:chExt cx="0" cy="0"/>
+        </a:xfrm>
+      </p:grpSpPr>
+      <p:graphicFrame>
+        <p:nvGraphicFramePr>
+          <p:cNvPr id="4" name="think-cell data - do not delete" hidden="1">
+            <a:extLst>
+              <a:ext uri="{FF2B5EF4-FFF2-40B4-BE49-F238E27FC236}">
+                <a16:creationId xmlns:a16="http://schemas.microsoft.com/office/drawing/2014/main" id="{053277D1-7881-6E61-3B36-DAEFA1678460}"/>
+              </a:ext>
+            </a:extLst>
+          </p:cNvPr>
+          <p:cNvGraphicFramePr>
+            <a:graphicFrameLocks noChangeAspect="1"/>
+          </p:cNvGraphicFramePr>
+          <p:nvPr>
+            <p:custDataLst>
+              <p:tags r:id="rId1"/>
+            </p:custDataLst>
+            <p:extLst>
+              <p:ext uri="{D42A27DB-BD31-4B8C-83A1-F6EECF244321}">
+                <p14:modId xmlns:p14="http://schemas.microsoft.com/office/powerpoint/2010/main" val="855969851"/>
+              </p:ext>
+            </p:extLst>
+          </p:nvPr>
+        </p:nvGraphicFramePr>
+        <p:xfrm>
+          <a:off x="1588" y="1588"/>
+          <a:ext cx="1588" cy="1588"/>
+        </p:xfrm>
+        <a:graphic>
+          <a:graphicData uri="http://schemas.openxmlformats.org/presentationml/2006/ole">
+            <mc:AlternateContent xmlns:mc="http://schemas.openxmlformats.org/markup-compatibility/2006">
+              <mc:Choice xmlns:v="urn:schemas-microsoft-com:vml" Requires="v">
+                <p:oleObj name="think-cell Slide" r:id="rId3" imgW="606" imgH="608" progId="TCLayout.ActiveDocument.1">
+                  <p:embed/>
+                </p:oleObj>
+              </mc:Choice>
+              <mc:Fallback>
+                <p:oleObj name="think-cell Slide" r:id="rId3" imgW="606" imgH="608" progId="TCLayout.ActiveDocument.1">
+                  <p:embed/>
+                  <p:pic>
+                    <p:nvPicPr>
+                      <p:cNvPr id="0" name=""/>
+                      <p:cNvPicPr/>
+                      <p:nvPr/>
+                    </p:nvPicPr>
+                    <p:blipFill>
+                      <a:blip r:embed="rId4"/>
+                      <a:stretch>
+                        <a:fillRect/>
+                      </a:stretch>
+                    </p:blipFill>
+                    <p:spPr>
+                      <a:xfrm>
+                        <a:off x="1588" y="1588"/>
+                        <a:ext cx="1588" cy="1588"/>
+                      </a:xfrm>
+                      <a:prstGeom prst="rect">
+                        <a:avLst/>
+                      </a:prstGeom>
+                    </p:spPr>
+                  </p:pic>
+                </p:oleObj>
+              </mc:Fallback>
+            </mc:AlternateContent>
+          </a:graphicData>
+        </a:graphic>
+      </p:graphicFrame>
+      <p:sp>
+        <p:nvSpPr>
+          <p:cNvPr id="2" name="Title 1">
+            <a:extLst>
+              <a:ext uri="{FF2B5EF4-FFF2-40B4-BE49-F238E27FC236}">
+                <a16:creationId xmlns:a16="http://schemas.microsoft.com/office/drawing/2014/main" id="{11A05D04-8075-8131-1AF9-42A295DB0A84}"/>
+              </a:ext>
+            </a:extLst>
+          </p:cNvPr>
+          <p:cNvSpPr>
+            <a:spLocks noGrp="1"/>
+          </p:cNvSpPr>
+          <p:nvPr>
+            <p:ph type="title"/>
+          </p:nvPr>
+        </p:nvSpPr>
+        <p:spPr/>
+        <p:txBody>
+          <a:bodyPr vert="horz"/>
+          <a:lstStyle/>
+          <a:p>
+            <a:r>
+              <a:rPr lang="en-US" dirty="0"/>
+              <a:t>References</a:t>
+            </a:r>
+          </a:p>
+        </p:txBody>
+      </p:sp>
+      <p:sp>
+        <p:nvSpPr>
+          <p:cNvPr id="3" name="Content Placeholder 2">
+            <a:extLst>
+              <a:ext uri="{FF2B5EF4-FFF2-40B4-BE49-F238E27FC236}">
+                <a16:creationId xmlns:a16="http://schemas.microsoft.com/office/drawing/2014/main" id="{4AF5C313-C931-148A-01B7-C1B7651B8FFF}"/>
+              </a:ext>
+            </a:extLst>
+          </p:cNvPr>
+          <p:cNvSpPr>
+            <a:spLocks noGrp="1"/>
+          </p:cNvSpPr>
+          <p:nvPr>
+            <p:ph idx="1"/>
+          </p:nvPr>
+        </p:nvSpPr>
+        <p:spPr/>
+        <p:txBody>
+          <a:bodyPr/>
+          <a:lstStyle/>
+          <a:p>
+            <a:r>
+              <a:rPr lang="en-US" dirty="0">
+                <a:hlinkClick r:id="rId5"/>
+              </a:rPr>
+              <a:t>https://docs.pola.rs/#key-features</a:t>
+            </a:r>
+            <a:endParaRPr lang="en-US" dirty="0"/>
+          </a:p>
+          <a:p>
+            <a:r>
+              <a:rPr lang="en-US" dirty="0">
+                <a:hlinkClick r:id="rId6"/>
+              </a:rPr>
+              <a:t>https://realpython.com/polars-python/</a:t>
+            </a:r>
+            <a:endParaRPr lang="en-US" dirty="0"/>
+          </a:p>
+          <a:p>
+            <a:r>
+              <a:rPr lang="en-US" dirty="0">
+                <a:hlinkClick r:id="rId7"/>
+              </a:rPr>
+              <a:t>https://cliffy-gardens.medium.com/using-python-polars-my-late-2024-review-da806618a102</a:t>
+            </a:r>
+            <a:endParaRPr lang="en-US" dirty="0"/>
+          </a:p>
+          <a:p>
+            <a:r>
+              <a:rPr lang="en-US" dirty="0">
+                <a:hlinkClick r:id="rId8"/>
+              </a:rPr>
+              <a:t>https://stuffbyyuki.com/wp-content/uploads/2023/06/polars-vs-pandas-arrow-vs-pandas-1.png</a:t>
+            </a:r>
+            <a:endParaRPr lang="en-US" dirty="0"/>
+          </a:p>
+          <a:p>
+            <a:r>
+              <a:rPr lang="en-US" dirty="0">
+                <a:hlinkClick r:id="rId9"/>
+              </a:rPr>
+              <a:t>https://en.wikipedia.org/wiki/Polar_coordinate_system#:~:text=The%20distance%20from%20the%20pole,to%20model%20using%20polar%20coordinates</a:t>
+            </a:r>
+            <a:r>
+              <a:rPr lang="en-US" dirty="0"/>
+              <a:t>.</a:t>
+            </a:r>
+          </a:p>
+          <a:p>
+            <a:endParaRPr lang="en-US" dirty="0"/>
+          </a:p>
+          <a:p>
+            <a:endParaRPr lang="en-US" dirty="0"/>
+          </a:p>
+          <a:p>
+            <a:endParaRPr lang="en-US" dirty="0"/>
+          </a:p>
+          <a:p>
+            <a:endParaRPr lang="en-US" dirty="0"/>
+          </a:p>
+        </p:txBody>
+      </p:sp>
+    </p:spTree>
+    <p:extLst>
+      <p:ext uri="{BB962C8B-B14F-4D97-AF65-F5344CB8AC3E}">
+        <p14:creationId xmlns:p14="http://schemas.microsoft.com/office/powerpoint/2010/main" val="4048664199"/>
+      </p:ext>
+    </p:extLst>
+  </p:cSld>
+  <p:clrMapOvr>
+    <a:masterClrMapping/>
+  </p:clrMapOvr>
+</p:sld>
+</file>
+
+<file path=ppt/slides/slide11.xml><?xml version="1.0" encoding="utf-8"?>
+<p:sld xmlns:a="http://schemas.openxmlformats.org/drawingml/2006/main" xmlns:r="http://schemas.openxmlformats.org/officeDocument/2006/relationships" xmlns:p="http://schemas.openxmlformats.org/presentationml/2006/main">
+  <p:cSld>
+    <p:spTree>
+      <p:nvGrpSpPr>
+        <p:cNvPr id="1" name=""/>
+        <p:cNvGrpSpPr/>
+        <p:nvPr/>
+      </p:nvGrpSpPr>
+      <p:grpSpPr>
+        <a:xfrm>
+          <a:off x="0" y="0"/>
+          <a:ext cx="0" cy="0"/>
+          <a:chOff x="0" y="0"/>
+          <a:chExt cx="0" cy="0"/>
+        </a:xfrm>
+      </p:grpSpPr>
+      <p:graphicFrame>
+        <p:nvGraphicFramePr>
+          <p:cNvPr id="4" name="think-cell data - do not delete" hidden="1">
+            <a:extLst>
+              <a:ext uri="{FF2B5EF4-FFF2-40B4-BE49-F238E27FC236}">
+                <a16:creationId xmlns:a16="http://schemas.microsoft.com/office/drawing/2014/main" id="{0776722E-4520-005B-AD65-6922D22D49A0}"/>
+              </a:ext>
+            </a:extLst>
+          </p:cNvPr>
+          <p:cNvGraphicFramePr>
+            <a:graphicFrameLocks noChangeAspect="1"/>
+          </p:cNvGraphicFramePr>
+          <p:nvPr>
+            <p:custDataLst>
+              <p:tags r:id="rId1"/>
+            </p:custDataLst>
+            <p:extLst>
+              <p:ext uri="{D42A27DB-BD31-4B8C-83A1-F6EECF244321}">
+                <p14:modId xmlns:p14="http://schemas.microsoft.com/office/powerpoint/2010/main" val="4228134379"/>
+              </p:ext>
+            </p:extLst>
+          </p:nvPr>
+        </p:nvGraphicFramePr>
+        <p:xfrm>
+          <a:off x="1588" y="1588"/>
+          <a:ext cx="1588" cy="1588"/>
+        </p:xfrm>
+        <a:graphic>
+          <a:graphicData uri="http://schemas.openxmlformats.org/presentationml/2006/ole">
+            <mc:AlternateContent xmlns:mc="http://schemas.openxmlformats.org/markup-compatibility/2006">
+              <mc:Choice xmlns:v="urn:schemas-microsoft-com:vml" Requires="v">
+                <p:oleObj name="think-cell Slide" r:id="rId3" imgW="606" imgH="608" progId="TCLayout.ActiveDocument.1">
+                  <p:embed/>
+                </p:oleObj>
+              </mc:Choice>
+              <mc:Fallback>
+                <p:oleObj name="think-cell Slide" r:id="rId3" imgW="606" imgH="608" progId="TCLayout.ActiveDocument.1">
+                  <p:embed/>
+                  <p:pic>
+                    <p:nvPicPr>
+                      <p:cNvPr id="0" name=""/>
+                      <p:cNvPicPr/>
+                      <p:nvPr/>
+                    </p:nvPicPr>
+                    <p:blipFill>
+                      <a:blip r:embed="rId4"/>
+                      <a:stretch>
+                        <a:fillRect/>
+                      </a:stretch>
+                    </p:blipFill>
+                    <p:spPr>
+                      <a:xfrm>
+                        <a:off x="1588" y="1588"/>
+                        <a:ext cx="1588" cy="1588"/>
+                      </a:xfrm>
+                      <a:prstGeom prst="rect">
+                        <a:avLst/>
+                      </a:prstGeom>
+                    </p:spPr>
+                  </p:pic>
+                </p:oleObj>
+              </mc:Fallback>
+            </mc:AlternateContent>
+          </a:graphicData>
+        </a:graphic>
+      </p:graphicFrame>
+      <p:sp>
+        <p:nvSpPr>
+          <p:cNvPr id="2" name="Title 1">
+            <a:extLst>
+              <a:ext uri="{FF2B5EF4-FFF2-40B4-BE49-F238E27FC236}">
+                <a16:creationId xmlns:a16="http://schemas.microsoft.com/office/drawing/2014/main" id="{3D39B0E1-E603-018C-0D3C-2E95504C8543}"/>
+              </a:ext>
+            </a:extLst>
+          </p:cNvPr>
+          <p:cNvSpPr>
+            <a:spLocks noGrp="1"/>
+          </p:cNvSpPr>
+          <p:nvPr>
+            <p:ph type="title"/>
+          </p:nvPr>
+        </p:nvSpPr>
+        <p:spPr/>
+        <p:txBody>
+          <a:bodyPr vert="horz"/>
+          <a:lstStyle/>
+          <a:p>
+            <a:r>
+              <a:rPr lang="en-US" dirty="0" err="1"/>
+              <a:t>Apendix</a:t>
+            </a:r>
+            <a:endParaRPr lang="en-US" dirty="0"/>
+          </a:p>
+        </p:txBody>
+      </p:sp>
+      <p:sp>
+        <p:nvSpPr>
+          <p:cNvPr id="3" name="Content Placeholder 2">
+            <a:extLst>
+              <a:ext uri="{FF2B5EF4-FFF2-40B4-BE49-F238E27FC236}">
+                <a16:creationId xmlns:a16="http://schemas.microsoft.com/office/drawing/2014/main" id="{331EECA9-D296-06AA-7613-7B9B00ECF7D1}"/>
+              </a:ext>
+            </a:extLst>
+          </p:cNvPr>
+          <p:cNvSpPr>
+            <a:spLocks noGrp="1"/>
+          </p:cNvSpPr>
+          <p:nvPr>
+            <p:ph idx="1"/>
+          </p:nvPr>
+        </p:nvSpPr>
+        <p:spPr/>
+        <p:txBody>
+          <a:bodyPr>
+            <a:normAutofit/>
+          </a:bodyPr>
+          <a:lstStyle/>
+          <a:p>
+            <a:r>
+              <a:rPr lang="en-US" sz="1800" dirty="0"/>
+              <a:t>The goal of Polars is to provide a lightning fast </a:t>
+            </a:r>
+            <a:r>
+              <a:rPr lang="en-US" sz="1800" dirty="0" err="1"/>
+              <a:t>DataFrame</a:t>
+            </a:r>
+            <a:r>
+              <a:rPr lang="en-US" sz="1800" dirty="0"/>
+              <a:t> library that:</a:t>
+            </a:r>
+          </a:p>
+          <a:p>
+            <a:endParaRPr lang="en-US" sz="1800" dirty="0"/>
+          </a:p>
+          <a:p>
+            <a:r>
+              <a:rPr lang="en-US" sz="1800" dirty="0"/>
+              <a:t>Utilizes all available cores on your machine.</a:t>
+            </a:r>
+          </a:p>
+          <a:p>
+            <a:r>
+              <a:rPr lang="en-US" sz="1800" dirty="0"/>
+              <a:t>Optimizes queries to reduce unneeded work/memory allocations.</a:t>
+            </a:r>
+          </a:p>
+          <a:p>
+            <a:r>
+              <a:rPr lang="en-US" sz="1800" dirty="0"/>
+              <a:t>Handles datasets much larger than your available RAM.</a:t>
+            </a:r>
+          </a:p>
+          <a:p>
+            <a:r>
+              <a:rPr lang="en-US" sz="1800" dirty="0"/>
+              <a:t>A consistent and predictable API.</a:t>
+            </a:r>
+          </a:p>
+          <a:p>
+            <a:r>
+              <a:rPr lang="en-US" sz="1800" dirty="0"/>
+              <a:t>Adheres to a strict schema (data-types should be known before running the query).</a:t>
+            </a:r>
+          </a:p>
+          <a:p>
+            <a:r>
+              <a:rPr lang="en-US" sz="1800" dirty="0"/>
+              <a:t>Polars is written in Rust which gives it C/C++ performance and allows it to fully control performance-critical parts in a query engine.</a:t>
+            </a:r>
+          </a:p>
+        </p:txBody>
+      </p:sp>
+    </p:spTree>
+    <p:extLst>
+      <p:ext uri="{BB962C8B-B14F-4D97-AF65-F5344CB8AC3E}">
+        <p14:creationId xmlns:p14="http://schemas.microsoft.com/office/powerpoint/2010/main" val="1243977546"/>
+      </p:ext>
+    </p:extLst>
+  </p:cSld>
+  <p:clrMapOvr>
+    <a:masterClrMapping/>
+  </p:clrMapOvr>
+</p:sld>
+</file>
+
 <file path=ppt/slides/slide2.xml><?xml version="1.0" encoding="utf-8"?>
 <p:sld xmlns:a="http://schemas.openxmlformats.org/drawingml/2006/main" xmlns:r="http://schemas.openxmlformats.org/officeDocument/2006/relationships" xmlns:p="http://schemas.openxmlformats.org/presentationml/2006/main">
   <p:cSld>
@@ -3669,7 +4515,12 @@
             <p:ph idx="1"/>
           </p:nvPr>
         </p:nvSpPr>
-        <p:spPr/>
+        <p:spPr>
+          <a:xfrm>
+            <a:off x="838200" y="1825625"/>
+            <a:ext cx="7848600" cy="4351338"/>
+          </a:xfrm>
+        </p:spPr>
         <p:txBody>
           <a:bodyPr>
             <a:noAutofit/>
@@ -3678,19 +4529,55 @@
           <a:p>
             <a:r>
               <a:rPr lang="en-US" sz="1800" dirty="0"/>
-              <a:t>The name "Polars" for the Python data frame library originates from its core design principle of leveraging CPU parallelism. Just as polar coordinates define a plane using angles and a radius extending outwards (radially) from a central point, Polars is designed to process data by radiating computations outwards across multiple CPU cores simultaneously. </a:t>
-            </a:r>
-          </a:p>
-          <a:p>
+              <a:t>The name "Polars" for the Python data frame library originates from its core design principle of </a:t>
+            </a:r>
+            <a:r>
+              <a:rPr lang="en-US" sz="1800" b="1" dirty="0"/>
+              <a:t>leveraging CPU parallelism</a:t>
+            </a:r>
             <a:r>
               <a:rPr lang="en-US" sz="1800" dirty="0"/>
-              <a:t>The Polars library in Python is a high-performance data manipulation library designed primarily for use in data science, data analysis, and machine learning contexts. It provides functionalities similar to pandas but is optimized to handle large datasets more efficiently. </a:t>
+              <a:t>. Just as polar coordinates define a plane using angles and a radius extending outwards (radially) from a central point, Polars is designed to process data by radiating computations outwards across multiple CPU cores simultaneously. </a:t>
             </a:r>
           </a:p>
           <a:p>
             <a:r>
               <a:rPr lang="en-US" sz="1800" dirty="0"/>
-              <a:t>It is written in Rust and is known for its high performance and efficiency, particularly when working with large datasets. Polars utilizes a multi-threaded query engine and columnar storage, enabling parallel processing and optimized memory usage. It supports lazy evaluation, optimizing queries for better performance and reduced memory consumption. </a:t>
+              <a:t>The Polars library in Python is a high-performance data manipulation library designed primarily for </a:t>
+            </a:r>
+            <a:r>
+              <a:rPr lang="en-US" sz="1800" b="1" dirty="0"/>
+              <a:t>use in data science, data analysis, and machine learning contexts</a:t>
+            </a:r>
+            <a:r>
+              <a:rPr lang="en-US" sz="1800" dirty="0"/>
+              <a:t>. It provides functionalities similar to pandas but is optimized to handle large datasets more efficiently. </a:t>
+            </a:r>
+          </a:p>
+          <a:p>
+            <a:r>
+              <a:rPr lang="en-US" sz="1800" b="1" dirty="0"/>
+              <a:t>It is written in Rust </a:t>
+            </a:r>
+            <a:r>
+              <a:rPr lang="en-US" sz="1800" dirty="0"/>
+              <a:t>– a</a:t>
+            </a:r>
+            <a:r>
+              <a:rPr lang="en-US" sz="1800" b="1" dirty="0"/>
+              <a:t> </a:t>
+            </a:r>
+            <a:r>
+              <a:rPr lang="en-US" sz="1800" dirty="0"/>
+              <a:t>system programming language designed for safety, speed, and concurrency particularly when working with large datasets. Polars utilizes a multi-threaded query engine and columnar storage, enabling parallel processing and optimized memory usage. It supports </a:t>
+            </a:r>
+            <a:r>
+              <a:rPr lang="en-US" sz="1800" b="1" dirty="0"/>
+              <a:t>lazy evaluation</a:t>
+            </a:r>
+            <a:r>
+              <a:rPr lang="en-US" sz="1800" dirty="0"/>
+              <a:t>, optimizing queries for better performance and reduced memory consumption. </a:t>
             </a:r>
           </a:p>
           <a:p>
@@ -3698,6 +4585,41 @@
           </a:p>
         </p:txBody>
       </p:sp>
+      <p:pic>
+        <p:nvPicPr>
+          <p:cNvPr id="6" name="Picture 5">
+            <a:extLst>
+              <a:ext uri="{FF2B5EF4-FFF2-40B4-BE49-F238E27FC236}">
+                <a16:creationId xmlns:a16="http://schemas.microsoft.com/office/drawing/2014/main" id="{3B68CB5F-C0EA-C23F-BFDD-3E296AFC1E16}"/>
+              </a:ext>
+            </a:extLst>
+          </p:cNvPr>
+          <p:cNvPicPr>
+            <a:picLocks noChangeAspect="1"/>
+          </p:cNvPicPr>
+          <p:nvPr/>
+        </p:nvPicPr>
+        <p:blipFill>
+          <a:blip r:embed="rId5"/>
+          <a:stretch>
+            <a:fillRect/>
+          </a:stretch>
+        </p:blipFill>
+        <p:spPr>
+          <a:xfrm>
+            <a:off x="8819418" y="2016003"/>
+            <a:ext cx="3028950" cy="3571875"/>
+          </a:xfrm>
+          <a:prstGeom prst="rect">
+            <a:avLst/>
+          </a:prstGeom>
+          <a:ln>
+            <a:solidFill>
+              <a:schemeClr val="accent1"/>
+            </a:solidFill>
+          </a:ln>
+        </p:spPr>
+      </p:pic>
     </p:spTree>
     <p:extLst>
       <p:ext uri="{BB962C8B-B14F-4D97-AF65-F5344CB8AC3E}">
@@ -3890,12 +4812,8 @@
               <a:t>Parallel: </a:t>
             </a:r>
             <a:r>
-              <a:rPr lang="en-US" sz="1800" dirty="0" err="1"/>
-              <a:t>Utilises</a:t>
-            </a:r>
-            <a:r>
               <a:rPr lang="en-US" sz="1800" dirty="0"/>
-              <a:t> the power of your machine by dividing the workload among the available CPU cores without any additional configuration.</a:t>
+              <a:t>Utilizes the power of your machine by dividing the workload among the available CPU cores without any additional configuration.</a:t>
             </a:r>
           </a:p>
           <a:p>
@@ -3940,12 +4858,78 @@
           <a:chExt cx="0" cy="0"/>
         </a:xfrm>
       </p:grpSpPr>
+      <p:graphicFrame>
+        <p:nvGraphicFramePr>
+          <p:cNvPr id="7" name="think-cell data - do not delete" hidden="1">
+            <a:extLst>
+              <a:ext uri="{FF2B5EF4-FFF2-40B4-BE49-F238E27FC236}">
+                <a16:creationId xmlns:a16="http://schemas.microsoft.com/office/drawing/2014/main" id="{3D3076D6-9C6B-5417-96FE-96E4196D1699}"/>
+              </a:ext>
+            </a:extLst>
+          </p:cNvPr>
+          <p:cNvGraphicFramePr>
+            <a:graphicFrameLocks noChangeAspect="1"/>
+          </p:cNvGraphicFramePr>
+          <p:nvPr>
+            <p:custDataLst>
+              <p:tags r:id="rId1"/>
+            </p:custDataLst>
+            <p:extLst>
+              <p:ext uri="{D42A27DB-BD31-4B8C-83A1-F6EECF244321}">
+                <p14:modId xmlns:p14="http://schemas.microsoft.com/office/powerpoint/2010/main" val="10066475"/>
+              </p:ext>
+            </p:extLst>
+          </p:nvPr>
+        </p:nvGraphicFramePr>
+        <p:xfrm>
+          <a:off x="1588" y="1588"/>
+          <a:ext cx="1588" cy="1588"/>
+        </p:xfrm>
+        <a:graphic>
+          <a:graphicData uri="http://schemas.openxmlformats.org/presentationml/2006/ole">
+            <mc:AlternateContent xmlns:mc="http://schemas.openxmlformats.org/markup-compatibility/2006">
+              <mc:Choice xmlns:v="urn:schemas-microsoft-com:vml" Requires="v">
+                <p:oleObj name="think-cell Slide" r:id="rId3" imgW="360" imgH="360" progId="TCLayout.ActiveDocument.1">
+                  <p:embed/>
+                </p:oleObj>
+              </mc:Choice>
+              <mc:Fallback>
+                <p:oleObj name="think-cell Slide" r:id="rId3" imgW="360" imgH="360" progId="TCLayout.ActiveDocument.1">
+                  <p:embed/>
+                  <p:pic>
+                    <p:nvPicPr>
+                      <p:cNvPr id="0" name=""/>
+                      <p:cNvPicPr/>
+                      <p:nvPr/>
+                    </p:nvPicPr>
+                    <p:blipFill>
+                      <a:blip r:embed="rId4"/>
+                      <a:stretch>
+                        <a:fillRect/>
+                      </a:stretch>
+                    </p:blipFill>
+                    <p:spPr>
+                      <a:xfrm>
+                        <a:off x="1588" y="1588"/>
+                        <a:ext cx="1588" cy="1588"/>
+                      </a:xfrm>
+                      <a:prstGeom prst="rect">
+                        <a:avLst/>
+                      </a:prstGeom>
+                    </p:spPr>
+                  </p:pic>
+                </p:oleObj>
+              </mc:Fallback>
+            </mc:AlternateContent>
+          </a:graphicData>
+        </a:graphic>
+      </p:graphicFrame>
       <p:sp>
         <p:nvSpPr>
           <p:cNvPr id="2" name="Title 1">
             <a:extLst>
               <a:ext uri="{FF2B5EF4-FFF2-40B4-BE49-F238E27FC236}">
-                <a16:creationId xmlns:a16="http://schemas.microsoft.com/office/drawing/2014/main" id="{4FD1668A-5CB4-D98C-9490-7CC399CAF16E}"/>
+                <a16:creationId xmlns:a16="http://schemas.microsoft.com/office/drawing/2014/main" id="{7B8085DC-23DD-40D8-53B5-BEAE08C8F9D3}"/>
               </a:ext>
             </a:extLst>
           </p:cNvPr>
@@ -3958,430 +4942,84 @@
         </p:nvSpPr>
         <p:spPr/>
         <p:txBody>
-          <a:bodyPr/>
-          <a:lstStyle/>
-          <a:p>
-            <a:endParaRPr lang="en-US"/>
-          </a:p>
-        </p:txBody>
-      </p:sp>
-      <p:sp>
-        <p:nvSpPr>
-          <p:cNvPr id="3" name="Content Placeholder 2">
-            <a:extLst>
-              <a:ext uri="{FF2B5EF4-FFF2-40B4-BE49-F238E27FC236}">
-                <a16:creationId xmlns:a16="http://schemas.microsoft.com/office/drawing/2014/main" id="{401D73A1-2EAB-752C-8ED1-B287E26D61D2}"/>
-              </a:ext>
-            </a:extLst>
-          </p:cNvPr>
-          <p:cNvSpPr>
-            <a:spLocks noGrp="1"/>
-          </p:cNvSpPr>
+          <a:bodyPr vert="horz"/>
+          <a:lstStyle/>
+          <a:p>
+            <a:r>
+              <a:rPr lang="en-US" dirty="0"/>
+              <a:t>Performance Comparison Results</a:t>
+            </a:r>
+          </a:p>
+        </p:txBody>
+      </p:sp>
+      <p:pic>
+        <p:nvPicPr>
+          <p:cNvPr id="5" name="Content Placeholder 4">
+            <a:extLst>
+              <a:ext uri="{FF2B5EF4-FFF2-40B4-BE49-F238E27FC236}">
+                <a16:creationId xmlns:a16="http://schemas.microsoft.com/office/drawing/2014/main" id="{D2411D38-0965-0001-1013-86F449CA1306}"/>
+              </a:ext>
+            </a:extLst>
+          </p:cNvPr>
+          <p:cNvPicPr>
+            <a:picLocks noGrp="1" noChangeAspect="1"/>
+          </p:cNvPicPr>
           <p:nvPr>
             <p:ph idx="1"/>
           </p:nvPr>
-        </p:nvSpPr>
-        <p:spPr/>
-        <p:txBody>
-          <a:bodyPr/>
-          <a:lstStyle/>
-          <a:p>
-            <a:pPr marL="228600" marR="0" lvl="0" indent="-228600" algn="l" defTabSz="914400" rtl="0" eaLnBrk="1" fontAlgn="auto" latinLnBrk="0" hangingPunct="1">
-              <a:lnSpc>
-                <a:spcPct val="90000"/>
-              </a:lnSpc>
-              <a:spcBef>
-                <a:spcPts val="1000"/>
-              </a:spcBef>
-              <a:spcAft>
-                <a:spcPts val="0"/>
-              </a:spcAft>
-              <a:buClrTx/>
-              <a:buSzTx/>
-              <a:buFont typeface="+mj-lt"/>
-              <a:buAutoNum type="arabicPeriod"/>
-              <a:tabLst/>
-              <a:defRPr/>
-            </a:pPr>
-            <a:r>
-              <a:rPr kumimoji="0" lang="en-US" sz="1800" b="1" i="0" u="none" strike="noStrike" kern="1200" cap="none" spc="0" normalizeH="0" baseline="0" noProof="0" dirty="0">
-                <a:ln>
-                  <a:noFill/>
-                </a:ln>
-                <a:solidFill>
-                  <a:prstClr val="black"/>
-                </a:solidFill>
-                <a:effectLst/>
-                <a:uLnTx/>
-                <a:uFillTx/>
-                <a:latin typeface="Aptos" panose="02110004020202020204"/>
-                <a:ea typeface="+mn-ea"/>
-                <a:cs typeface="+mn-cs"/>
-              </a:rPr>
-              <a:t>Speed and Performance</a:t>
-            </a:r>
-            <a:r>
-              <a:rPr kumimoji="0" lang="en-US" sz="1800" b="0" i="0" u="none" strike="noStrike" kern="1200" cap="none" spc="0" normalizeH="0" baseline="0" noProof="0" dirty="0">
-                <a:ln>
-                  <a:noFill/>
-                </a:ln>
-                <a:solidFill>
-                  <a:prstClr val="black"/>
-                </a:solidFill>
-                <a:effectLst/>
-                <a:uLnTx/>
-                <a:uFillTx/>
-                <a:latin typeface="Aptos" panose="02110004020202020204"/>
-                <a:ea typeface="+mn-ea"/>
-                <a:cs typeface="+mn-cs"/>
-              </a:rPr>
-              <a:t>: Polars is built to be extremely fast, leveraging Rust's memory safety and speed. It uses multithreading effectively and can outperform pandas in many scenarios, especially on large datasets.</a:t>
-            </a:r>
-          </a:p>
-          <a:p>
-            <a:pPr marL="228600" marR="0" lvl="0" indent="-228600" algn="l" defTabSz="914400" rtl="0" eaLnBrk="1" fontAlgn="auto" latinLnBrk="0" hangingPunct="1">
-              <a:lnSpc>
-                <a:spcPct val="90000"/>
-              </a:lnSpc>
-              <a:spcBef>
-                <a:spcPts val="1000"/>
-              </a:spcBef>
-              <a:spcAft>
-                <a:spcPts val="0"/>
-              </a:spcAft>
-              <a:buClrTx/>
-              <a:buSzTx/>
-              <a:buFont typeface="+mj-lt"/>
-              <a:buAutoNum type="arabicPeriod"/>
-              <a:tabLst/>
-              <a:defRPr/>
-            </a:pPr>
-            <a:r>
-              <a:rPr kumimoji="0" lang="en-US" sz="1800" b="1" i="0" u="none" strike="noStrike" kern="1200" cap="none" spc="0" normalizeH="0" baseline="0" noProof="0" dirty="0">
-                <a:ln>
-                  <a:noFill/>
-                </a:ln>
-                <a:solidFill>
-                  <a:prstClr val="black"/>
-                </a:solidFill>
-                <a:effectLst/>
-                <a:uLnTx/>
-                <a:uFillTx/>
-                <a:latin typeface="Aptos" panose="02110004020202020204"/>
-                <a:ea typeface="+mn-ea"/>
-                <a:cs typeface="+mn-cs"/>
-              </a:rPr>
-              <a:t>Memory Efficiency</a:t>
-            </a:r>
-            <a:r>
-              <a:rPr kumimoji="0" lang="en-US" sz="1800" b="0" i="0" u="none" strike="noStrike" kern="1200" cap="none" spc="0" normalizeH="0" baseline="0" noProof="0" dirty="0">
-                <a:ln>
-                  <a:noFill/>
-                </a:ln>
-                <a:solidFill>
-                  <a:prstClr val="black"/>
-                </a:solidFill>
-                <a:effectLst/>
-                <a:uLnTx/>
-                <a:uFillTx/>
-                <a:latin typeface="Aptos" panose="02110004020202020204"/>
-                <a:ea typeface="+mn-ea"/>
-                <a:cs typeface="+mn-cs"/>
-              </a:rPr>
-              <a:t>: Due to its columnar storage model and optimized data structures, Polars is able to handle large datasets with a smaller memory footprint compared to pandas.</a:t>
-            </a:r>
-          </a:p>
-          <a:p>
-            <a:pPr marL="228600" marR="0" lvl="0" indent="-228600" algn="l" defTabSz="914400" rtl="0" eaLnBrk="1" fontAlgn="auto" latinLnBrk="0" hangingPunct="1">
-              <a:lnSpc>
-                <a:spcPct val="90000"/>
-              </a:lnSpc>
-              <a:spcBef>
-                <a:spcPts val="1000"/>
-              </a:spcBef>
-              <a:spcAft>
-                <a:spcPts val="0"/>
-              </a:spcAft>
-              <a:buClrTx/>
-              <a:buSzTx/>
-              <a:buFont typeface="+mj-lt"/>
-              <a:buAutoNum type="arabicPeriod"/>
-              <a:tabLst/>
-              <a:defRPr/>
-            </a:pPr>
-            <a:r>
-              <a:rPr kumimoji="0" lang="en-US" sz="1800" b="1" i="0" u="none" strike="noStrike" kern="1200" cap="none" spc="0" normalizeH="0" baseline="0" noProof="0" dirty="0">
-                <a:ln>
-                  <a:noFill/>
-                </a:ln>
-                <a:solidFill>
-                  <a:prstClr val="black"/>
-                </a:solidFill>
-                <a:effectLst/>
-                <a:uLnTx/>
-                <a:uFillTx/>
-                <a:latin typeface="Aptos" panose="02110004020202020204"/>
-                <a:ea typeface="+mn-ea"/>
-                <a:cs typeface="+mn-cs"/>
-              </a:rPr>
-              <a:t>Lazy Computations</a:t>
-            </a:r>
-            <a:r>
-              <a:rPr kumimoji="0" lang="en-US" sz="1800" b="0" i="0" u="none" strike="noStrike" kern="1200" cap="none" spc="0" normalizeH="0" baseline="0" noProof="0" dirty="0">
-                <a:ln>
-                  <a:noFill/>
-                </a:ln>
-                <a:solidFill>
-                  <a:prstClr val="black"/>
-                </a:solidFill>
-                <a:effectLst/>
-                <a:uLnTx/>
-                <a:uFillTx/>
-                <a:latin typeface="Aptos" panose="02110004020202020204"/>
-                <a:ea typeface="+mn-ea"/>
-                <a:cs typeface="+mn-cs"/>
-              </a:rPr>
-              <a:t>: Polars supports lazy evaluation, which means that computations are queued up and only executed when necessary. This approach can lead to more efficient use of resources and faster overall performance when processing very large datasets or complex chains of data transformations.</a:t>
-            </a:r>
-          </a:p>
-          <a:p>
-            <a:pPr marL="228600" marR="0" lvl="0" indent="-228600" algn="l" defTabSz="914400" rtl="0" eaLnBrk="1" fontAlgn="auto" latinLnBrk="0" hangingPunct="1">
-              <a:lnSpc>
-                <a:spcPct val="90000"/>
-              </a:lnSpc>
-              <a:spcBef>
-                <a:spcPts val="1000"/>
-              </a:spcBef>
-              <a:spcAft>
-                <a:spcPts val="0"/>
-              </a:spcAft>
-              <a:buClrTx/>
-              <a:buSzTx/>
-              <a:buFont typeface="+mj-lt"/>
-              <a:buAutoNum type="arabicPeriod"/>
-              <a:tabLst/>
-              <a:defRPr/>
-            </a:pPr>
-            <a:r>
-              <a:rPr kumimoji="0" lang="en-US" sz="1800" b="1" i="0" u="none" strike="noStrike" kern="1200" cap="none" spc="0" normalizeH="0" baseline="0" noProof="0" dirty="0">
-                <a:ln>
-                  <a:noFill/>
-                </a:ln>
-                <a:solidFill>
-                  <a:prstClr val="black"/>
-                </a:solidFill>
-                <a:effectLst/>
-                <a:uLnTx/>
-                <a:uFillTx/>
-                <a:latin typeface="Aptos" panose="02110004020202020204"/>
-                <a:ea typeface="+mn-ea"/>
-                <a:cs typeface="+mn-cs"/>
-              </a:rPr>
-              <a:t>Expressive Syntax</a:t>
-            </a:r>
-            <a:r>
-              <a:rPr kumimoji="0" lang="en-US" sz="1800" b="0" i="0" u="none" strike="noStrike" kern="1200" cap="none" spc="0" normalizeH="0" baseline="0" noProof="0" dirty="0">
-                <a:ln>
-                  <a:noFill/>
-                </a:ln>
-                <a:solidFill>
-                  <a:prstClr val="black"/>
-                </a:solidFill>
-                <a:effectLst/>
-                <a:uLnTx/>
-                <a:uFillTx/>
-                <a:latin typeface="Aptos" panose="02110004020202020204"/>
-                <a:ea typeface="+mn-ea"/>
-                <a:cs typeface="+mn-cs"/>
-              </a:rPr>
-              <a:t>: While it provides a similar API to pandas, making it easier for pandas users to adapt, Polars also includes its own set of powerful expressions that can be used to perform complex data manipulations more succinctly.</a:t>
-            </a:r>
-          </a:p>
-          <a:p>
-            <a:pPr marL="228600" marR="0" lvl="0" indent="-228600" algn="l" defTabSz="914400" rtl="0" eaLnBrk="1" fontAlgn="auto" latinLnBrk="0" hangingPunct="1">
-              <a:lnSpc>
-                <a:spcPct val="90000"/>
-              </a:lnSpc>
-              <a:spcBef>
-                <a:spcPts val="1000"/>
-              </a:spcBef>
-              <a:spcAft>
-                <a:spcPts val="0"/>
-              </a:spcAft>
-              <a:buClrTx/>
-              <a:buSzTx/>
-              <a:buFont typeface="+mj-lt"/>
-              <a:buAutoNum type="arabicPeriod"/>
-              <a:tabLst/>
-              <a:defRPr/>
-            </a:pPr>
-            <a:r>
-              <a:rPr kumimoji="0" lang="en-US" sz="1800" b="1" i="0" u="none" strike="noStrike" kern="1200" cap="none" spc="0" normalizeH="0" baseline="0" noProof="0" dirty="0">
-                <a:ln>
-                  <a:noFill/>
-                </a:ln>
-                <a:solidFill>
-                  <a:prstClr val="black"/>
-                </a:solidFill>
-                <a:effectLst/>
-                <a:uLnTx/>
-                <a:uFillTx/>
-                <a:latin typeface="Aptos" panose="02110004020202020204"/>
-                <a:ea typeface="+mn-ea"/>
-                <a:cs typeface="+mn-cs"/>
-              </a:rPr>
-              <a:t>Interoperability</a:t>
-            </a:r>
-            <a:r>
-              <a:rPr kumimoji="0" lang="en-US" sz="1800" b="0" i="0" u="none" strike="noStrike" kern="1200" cap="none" spc="0" normalizeH="0" baseline="0" noProof="0" dirty="0">
-                <a:ln>
-                  <a:noFill/>
-                </a:ln>
-                <a:solidFill>
-                  <a:prstClr val="black"/>
-                </a:solidFill>
-                <a:effectLst/>
-                <a:uLnTx/>
-                <a:uFillTx/>
-                <a:latin typeface="Aptos" panose="02110004020202020204"/>
-                <a:ea typeface="+mn-ea"/>
-                <a:cs typeface="+mn-cs"/>
-              </a:rPr>
-              <a:t>: Polars can work well with other Python libraries commonly used in the data science stack, such as NumPy and SciPy, and it can also interface with pandas </a:t>
-            </a:r>
-            <a:r>
-              <a:rPr kumimoji="0" lang="en-US" sz="1800" b="0" i="0" u="none" strike="noStrike" kern="1200" cap="none" spc="0" normalizeH="0" baseline="0" noProof="0" dirty="0" err="1">
-                <a:ln>
-                  <a:noFill/>
-                </a:ln>
-                <a:solidFill>
-                  <a:prstClr val="black"/>
-                </a:solidFill>
-                <a:effectLst/>
-                <a:uLnTx/>
-                <a:uFillTx/>
-                <a:latin typeface="Aptos" panose="02110004020202020204"/>
-                <a:ea typeface="+mn-ea"/>
-                <a:cs typeface="+mn-cs"/>
-              </a:rPr>
-              <a:t>DataFrames</a:t>
-            </a:r>
-            <a:r>
-              <a:rPr kumimoji="0" lang="en-US" sz="1800" b="0" i="0" u="none" strike="noStrike" kern="1200" cap="none" spc="0" normalizeH="0" baseline="0" noProof="0" dirty="0">
-                <a:ln>
-                  <a:noFill/>
-                </a:ln>
-                <a:solidFill>
-                  <a:prstClr val="black"/>
-                </a:solidFill>
-                <a:effectLst/>
-                <a:uLnTx/>
-                <a:uFillTx/>
-                <a:latin typeface="Aptos" panose="02110004020202020204"/>
-                <a:ea typeface="+mn-ea"/>
-                <a:cs typeface="+mn-cs"/>
-              </a:rPr>
-              <a:t> when needed.</a:t>
-            </a:r>
-          </a:p>
-          <a:p>
-            <a:pPr marL="228600" marR="0" lvl="0" indent="-228600" algn="l" defTabSz="914400" rtl="0" eaLnBrk="1" fontAlgn="auto" latinLnBrk="0" hangingPunct="1">
-              <a:lnSpc>
-                <a:spcPct val="90000"/>
-              </a:lnSpc>
-              <a:spcBef>
-                <a:spcPts val="1000"/>
-              </a:spcBef>
-              <a:spcAft>
-                <a:spcPts val="0"/>
-              </a:spcAft>
-              <a:buClrTx/>
-              <a:buSzTx/>
-              <a:buFont typeface="+mj-lt"/>
-              <a:buAutoNum type="arabicPeriod"/>
-              <a:tabLst/>
-              <a:defRPr/>
-            </a:pPr>
-            <a:r>
-              <a:rPr kumimoji="0" lang="en-US" sz="1800" b="1" i="0" u="none" strike="noStrike" kern="1200" cap="none" spc="0" normalizeH="0" baseline="0" noProof="0" dirty="0">
-                <a:ln>
-                  <a:noFill/>
-                </a:ln>
-                <a:solidFill>
-                  <a:prstClr val="black"/>
-                </a:solidFill>
-                <a:effectLst/>
-                <a:uLnTx/>
-                <a:uFillTx/>
-                <a:latin typeface="Aptos" panose="02110004020202020204"/>
-                <a:ea typeface="+mn-ea"/>
-                <a:cs typeface="+mn-cs"/>
-              </a:rPr>
-              <a:t>Versatility</a:t>
-            </a:r>
-            <a:r>
-              <a:rPr kumimoji="0" lang="en-US" sz="1800" b="0" i="0" u="none" strike="noStrike" kern="1200" cap="none" spc="0" normalizeH="0" baseline="0" noProof="0" dirty="0">
-                <a:ln>
-                  <a:noFill/>
-                </a:ln>
-                <a:solidFill>
-                  <a:prstClr val="black"/>
-                </a:solidFill>
-                <a:effectLst/>
-                <a:uLnTx/>
-                <a:uFillTx/>
-                <a:latin typeface="Aptos" panose="02110004020202020204"/>
-                <a:ea typeface="+mn-ea"/>
-                <a:cs typeface="+mn-cs"/>
-              </a:rPr>
-              <a:t>: It can be used for a variety of tasks like data cleaning, transformation, aggregation, and preparation for machine learning models.</a:t>
-            </a:r>
-          </a:p>
-          <a:p>
-            <a:pPr marL="228600" marR="0" lvl="0" indent="-228600" algn="l" defTabSz="914400" rtl="0" eaLnBrk="1" fontAlgn="auto" latinLnBrk="0" hangingPunct="1">
-              <a:lnSpc>
-                <a:spcPct val="90000"/>
-              </a:lnSpc>
-              <a:spcBef>
-                <a:spcPts val="1000"/>
-              </a:spcBef>
-              <a:spcAft>
-                <a:spcPts val="0"/>
-              </a:spcAft>
-              <a:buClrTx/>
-              <a:buSzTx/>
-              <a:buFont typeface="Arial" panose="020B0604020202020204" pitchFamily="34" charset="0"/>
-              <a:buChar char="•"/>
-              <a:tabLst/>
-              <a:defRPr/>
-            </a:pPr>
-            <a:r>
-              <a:rPr kumimoji="0" lang="en-US" sz="1800" b="0" i="0" u="none" strike="noStrike" kern="1200" cap="none" spc="0" normalizeH="0" baseline="0" noProof="0" dirty="0">
-                <a:ln>
-                  <a:noFill/>
-                </a:ln>
-                <a:solidFill>
-                  <a:prstClr val="black"/>
-                </a:solidFill>
-                <a:effectLst/>
-                <a:uLnTx/>
-                <a:uFillTx/>
-                <a:latin typeface="Aptos" panose="02110004020202020204"/>
-                <a:ea typeface="+mn-ea"/>
-                <a:cs typeface="+mn-cs"/>
-              </a:rPr>
-              <a:t>Polars is particularly useful in scenarios where performance and speed are critical, and it is often used as an alternative to pandas when working with very large datasets that do not fit comfortably into memory.</a:t>
-            </a:r>
-          </a:p>
-          <a:p>
-            <a:endParaRPr lang="en-US" dirty="0"/>
+        </p:nvPicPr>
+        <p:blipFill>
+          <a:blip r:embed="rId5"/>
+          <a:stretch>
+            <a:fillRect/>
+          </a:stretch>
+        </p:blipFill>
+        <p:spPr>
+          <a:xfrm>
+            <a:off x="633647" y="1690688"/>
+            <a:ext cx="10022630" cy="4813280"/>
+          </a:xfrm>
+        </p:spPr>
+      </p:pic>
+      <p:sp>
+        <p:nvSpPr>
+          <p:cNvPr id="15" name="TextBox 14">
+            <a:extLst>
+              <a:ext uri="{FF2B5EF4-FFF2-40B4-BE49-F238E27FC236}">
+                <a16:creationId xmlns:a16="http://schemas.microsoft.com/office/drawing/2014/main" id="{3DE061E6-2560-44F1-B9F2-E689A00EE85B}"/>
+              </a:ext>
+            </a:extLst>
+          </p:cNvPr>
+          <p:cNvSpPr txBox="1"/>
+          <p:nvPr/>
+        </p:nvSpPr>
+        <p:spPr>
+          <a:xfrm>
+            <a:off x="6662372" y="6503968"/>
+            <a:ext cx="6097464" cy="230832"/>
+          </a:xfrm>
+          <a:prstGeom prst="rect">
+            <a:avLst/>
+          </a:prstGeom>
+          <a:noFill/>
+        </p:spPr>
+        <p:txBody>
+          <a:bodyPr wrap="square">
+            <a:spAutoFit/>
+          </a:bodyPr>
+          <a:lstStyle/>
+          <a:p>
+            <a:r>
+              <a:rPr lang="en-US" sz="900" dirty="0"/>
+              <a:t>Source: https://stuffbyyuki.com/wp-content/uploads/2023/06/polars-vs-pandas-arrow-vs-pandas-1.png</a:t>
+            </a:r>
           </a:p>
         </p:txBody>
       </p:sp>
     </p:spTree>
     <p:extLst>
       <p:ext uri="{BB962C8B-B14F-4D97-AF65-F5344CB8AC3E}">
-        <p14:creationId xmlns:p14="http://schemas.microsoft.com/office/powerpoint/2010/main" val="99921509"/>
+        <p14:creationId xmlns:p14="http://schemas.microsoft.com/office/powerpoint/2010/main" val="2195342330"/>
       </p:ext>
     </p:extLst>
   </p:cSld>
@@ -4392,6 +5030,283 @@
 </file>
 
 <file path=ppt/slides/slide5.xml><?xml version="1.0" encoding="utf-8"?>
+<p:sld xmlns:a="http://schemas.openxmlformats.org/drawingml/2006/main" xmlns:r="http://schemas.openxmlformats.org/officeDocument/2006/relationships" xmlns:p="http://schemas.openxmlformats.org/presentationml/2006/main">
+  <p:cSld>
+    <p:spTree>
+      <p:nvGrpSpPr>
+        <p:cNvPr id="1" name=""/>
+        <p:cNvGrpSpPr/>
+        <p:nvPr/>
+      </p:nvGrpSpPr>
+      <p:grpSpPr>
+        <a:xfrm>
+          <a:off x="0" y="0"/>
+          <a:ext cx="0" cy="0"/>
+          <a:chOff x="0" y="0"/>
+          <a:chExt cx="0" cy="0"/>
+        </a:xfrm>
+      </p:grpSpPr>
+      <p:graphicFrame>
+        <p:nvGraphicFramePr>
+          <p:cNvPr id="5" name="think-cell data - do not delete" hidden="1">
+            <a:extLst>
+              <a:ext uri="{FF2B5EF4-FFF2-40B4-BE49-F238E27FC236}">
+                <a16:creationId xmlns:a16="http://schemas.microsoft.com/office/drawing/2014/main" id="{BDF4EBE5-8649-3D08-90C0-221763565EEB}"/>
+              </a:ext>
+            </a:extLst>
+          </p:cNvPr>
+          <p:cNvGraphicFramePr>
+            <a:graphicFrameLocks noChangeAspect="1"/>
+          </p:cNvGraphicFramePr>
+          <p:nvPr>
+            <p:custDataLst>
+              <p:tags r:id="rId1"/>
+            </p:custDataLst>
+            <p:extLst>
+              <p:ext uri="{D42A27DB-BD31-4B8C-83A1-F6EECF244321}">
+                <p14:modId xmlns:p14="http://schemas.microsoft.com/office/powerpoint/2010/main" val="1626589032"/>
+              </p:ext>
+            </p:extLst>
+          </p:nvPr>
+        </p:nvGraphicFramePr>
+        <p:xfrm>
+          <a:off x="1588" y="1588"/>
+          <a:ext cx="1588" cy="1588"/>
+        </p:xfrm>
+        <a:graphic>
+          <a:graphicData uri="http://schemas.openxmlformats.org/presentationml/2006/ole">
+            <mc:AlternateContent xmlns:mc="http://schemas.openxmlformats.org/markup-compatibility/2006">
+              <mc:Choice xmlns:v="urn:schemas-microsoft-com:vml" Requires="v">
+                <p:oleObj name="think-cell Slide" r:id="rId3" imgW="360" imgH="360" progId="TCLayout.ActiveDocument.1">
+                  <p:embed/>
+                </p:oleObj>
+              </mc:Choice>
+              <mc:Fallback>
+                <p:oleObj name="think-cell Slide" r:id="rId3" imgW="360" imgH="360" progId="TCLayout.ActiveDocument.1">
+                  <p:embed/>
+                  <p:pic>
+                    <p:nvPicPr>
+                      <p:cNvPr id="0" name=""/>
+                      <p:cNvPicPr/>
+                      <p:nvPr/>
+                    </p:nvPicPr>
+                    <p:blipFill>
+                      <a:blip r:embed="rId4"/>
+                      <a:stretch>
+                        <a:fillRect/>
+                      </a:stretch>
+                    </p:blipFill>
+                    <p:spPr>
+                      <a:xfrm>
+                        <a:off x="1588" y="1588"/>
+                        <a:ext cx="1588" cy="1588"/>
+                      </a:xfrm>
+                      <a:prstGeom prst="rect">
+                        <a:avLst/>
+                      </a:prstGeom>
+                    </p:spPr>
+                  </p:pic>
+                </p:oleObj>
+              </mc:Fallback>
+            </mc:AlternateContent>
+          </a:graphicData>
+        </a:graphic>
+      </p:graphicFrame>
+      <p:sp>
+        <p:nvSpPr>
+          <p:cNvPr id="2" name="Title 1">
+            <a:extLst>
+              <a:ext uri="{FF2B5EF4-FFF2-40B4-BE49-F238E27FC236}">
+                <a16:creationId xmlns:a16="http://schemas.microsoft.com/office/drawing/2014/main" id="{716C87CD-38A3-35AF-41A3-949B2212E82E}"/>
+              </a:ext>
+            </a:extLst>
+          </p:cNvPr>
+          <p:cNvSpPr>
+            <a:spLocks noGrp="1"/>
+          </p:cNvSpPr>
+          <p:nvPr>
+            <p:ph type="title"/>
+          </p:nvPr>
+        </p:nvSpPr>
+        <p:spPr/>
+        <p:txBody>
+          <a:bodyPr vert="horz"/>
+          <a:lstStyle/>
+          <a:p>
+            <a:r>
+              <a:rPr lang="en-US" dirty="0"/>
+              <a:t>Polars Use Cases</a:t>
+            </a:r>
+          </a:p>
+        </p:txBody>
+      </p:sp>
+      <p:sp>
+        <p:nvSpPr>
+          <p:cNvPr id="3" name="Content Placeholder 2">
+            <a:extLst>
+              <a:ext uri="{FF2B5EF4-FFF2-40B4-BE49-F238E27FC236}">
+                <a16:creationId xmlns:a16="http://schemas.microsoft.com/office/drawing/2014/main" id="{139E23C6-8404-39B7-0CE3-D97B4E2C524B}"/>
+              </a:ext>
+            </a:extLst>
+          </p:cNvPr>
+          <p:cNvSpPr>
+            <a:spLocks noGrp="1"/>
+          </p:cNvSpPr>
+          <p:nvPr>
+            <p:ph idx="1"/>
+          </p:nvPr>
+        </p:nvSpPr>
+        <p:spPr>
+          <a:xfrm>
+            <a:off x="838200" y="1825625"/>
+            <a:ext cx="11040208" cy="4351338"/>
+          </a:xfrm>
+        </p:spPr>
+        <p:txBody>
+          <a:bodyPr>
+            <a:noAutofit/>
+          </a:bodyPr>
+          <a:lstStyle/>
+          <a:p>
+            <a:r>
+              <a:rPr lang="en-US" sz="1800" b="1" dirty="0"/>
+              <a:t>Financial Data Analysis </a:t>
+            </a:r>
+            <a:r>
+              <a:rPr lang="en-US" sz="1400" dirty="0"/>
+              <a:t>- Polars can be used to analyze large financial datasets, such as stock prices or transaction data, to identify trends, calculate moving averages, and perform other calculations.</a:t>
+            </a:r>
+          </a:p>
+          <a:p>
+            <a:r>
+              <a:rPr lang="en-US" sz="1800" b="1" dirty="0"/>
+              <a:t>Log File Analysis </a:t>
+            </a:r>
+            <a:r>
+              <a:rPr lang="en-US" sz="1400" dirty="0"/>
+              <a:t>- Polars can efficiently process and analyze large log files to extract relevant information, identify errors, and monitor system performance.</a:t>
+            </a:r>
+          </a:p>
+          <a:p>
+            <a:r>
+              <a:rPr lang="en-US" sz="1800" b="1" dirty="0"/>
+              <a:t>ETL Processes </a:t>
+            </a:r>
+            <a:r>
+              <a:rPr lang="en-US" sz="1400" dirty="0"/>
+              <a:t>- Polars can be used to extract, transform, and load data from various sources, making it suitable for building data pipelines</a:t>
+            </a:r>
+          </a:p>
+          <a:p>
+            <a:r>
+              <a:rPr lang="en-US" sz="1800" b="1" dirty="0"/>
+              <a:t>Data Cleaning and Preprocessing</a:t>
+            </a:r>
+            <a:r>
+              <a:rPr lang="en-US" sz="1400" b="1" dirty="0"/>
+              <a:t> -</a:t>
+            </a:r>
+            <a:r>
+              <a:rPr lang="en-US" sz="1400" dirty="0"/>
+              <a:t> Polars provides tools for cleaning and preprocessing data, such as handling missing values, filtering rows, and transforming columns.</a:t>
+            </a:r>
+          </a:p>
+          <a:p>
+            <a:r>
+              <a:rPr lang="en-US" sz="1800" b="1" dirty="0"/>
+              <a:t>Large Dataset Handling </a:t>
+            </a:r>
+            <a:r>
+              <a:rPr lang="en-US" sz="1400" dirty="0"/>
+              <a:t>- Polars can handle datasets larger than available RAM due to its ability to work with data in chunks and its optimized query execution.</a:t>
+            </a:r>
+          </a:p>
+          <a:p>
+            <a:r>
+              <a:rPr lang="en-US" sz="1800" b="1" dirty="0"/>
+              <a:t>Geospatial Analysis</a:t>
+            </a:r>
+            <a:r>
+              <a:rPr lang="en-US" sz="1400" b="1" dirty="0"/>
+              <a:t> </a:t>
+            </a:r>
+            <a:r>
+              <a:rPr lang="en-US" sz="1400" dirty="0"/>
+              <a:t>- Polars, along with plugins like polars-</a:t>
+            </a:r>
+            <a:r>
+              <a:rPr lang="en-US" sz="1400" dirty="0" err="1"/>
+              <a:t>st</a:t>
+            </a:r>
+            <a:r>
+              <a:rPr lang="en-US" sz="1400" dirty="0"/>
+              <a:t>, can be used for geospatial operations on </a:t>
+            </a:r>
+            <a:r>
+              <a:rPr lang="en-US" sz="1400" dirty="0" err="1"/>
+              <a:t>dataframes</a:t>
+            </a:r>
+            <a:r>
+              <a:rPr lang="en-US" sz="1400" dirty="0"/>
+              <a:t>, such as calculating distances or performing spatial joins.</a:t>
+            </a:r>
+          </a:p>
+          <a:p>
+            <a:r>
+              <a:rPr lang="en-US" sz="1800" b="1" dirty="0"/>
+              <a:t>String Parsing and Manipulation </a:t>
+            </a:r>
+            <a:r>
+              <a:rPr lang="en-US" sz="1400" dirty="0"/>
+              <a:t>- Plugins like polars-</a:t>
+            </a:r>
+            <a:r>
+              <a:rPr lang="en-US" sz="1400" dirty="0" err="1"/>
+              <a:t>url</a:t>
+            </a:r>
+            <a:r>
+              <a:rPr lang="en-US" sz="1400" dirty="0"/>
+              <a:t> and </a:t>
+            </a:r>
+            <a:r>
+              <a:rPr lang="en-US" sz="1400" dirty="0" err="1"/>
+              <a:t>polars_iptools</a:t>
+            </a:r>
+            <a:r>
+              <a:rPr lang="en-US" sz="1400" dirty="0"/>
+              <a:t>, can parse and extract information from URLs and IP addresses.</a:t>
+            </a:r>
+          </a:p>
+          <a:p>
+            <a:r>
+              <a:rPr lang="en-US" sz="1800" b="1" dirty="0"/>
+              <a:t>Fuzzy Matching and Text Similarity </a:t>
+            </a:r>
+            <a:r>
+              <a:rPr lang="en-US" sz="1400" b="1" dirty="0"/>
+              <a:t>- </a:t>
+            </a:r>
+            <a:r>
+              <a:rPr lang="en-US" sz="1400" dirty="0"/>
+              <a:t>Plugins like polars-distance and polars-fuzzy-match, can be used for fuzzy matching and calculating text similarity between strings.</a:t>
+            </a:r>
+          </a:p>
+        </p:txBody>
+      </p:sp>
+    </p:spTree>
+    <p:extLst>
+      <p:ext uri="{BB962C8B-B14F-4D97-AF65-F5344CB8AC3E}">
+        <p14:creationId xmlns:p14="http://schemas.microsoft.com/office/powerpoint/2010/main" val="1699200895"/>
+      </p:ext>
+    </p:extLst>
+  </p:cSld>
+  <p:clrMapOvr>
+    <a:masterClrMapping/>
+  </p:clrMapOvr>
+</p:sld>
+</file>
+
+<file path=ppt/slides/slide6.xml><?xml version="1.0" encoding="utf-8"?>
 <p:sld xmlns:a="http://schemas.openxmlformats.org/drawingml/2006/main" xmlns:r="http://schemas.openxmlformats.org/officeDocument/2006/relationships" xmlns:p="http://schemas.openxmlformats.org/presentationml/2006/main">
   <p:cSld>
     <p:spTree>
@@ -4555,7 +5470,21 @@
             </a:r>
             <a:r>
               <a:rPr lang="en-US" sz="1600" dirty="0"/>
-              <a:t>: It's widely used for its ease of use and flexibility but can struggle with performance issues, especially with very large datasets. Its performance typically degrades as the size of the data grows beyond the memory capacity of a single machine.</a:t>
+              <a:t>: It's widely used for its ease of use and flexibility but can </a:t>
+            </a:r>
+            <a:r>
+              <a:rPr lang="en-US" sz="1600" dirty="0">
+                <a:solidFill>
+                  <a:schemeClr val="accent2">
+                    <a:lumMod val="75000"/>
+                  </a:schemeClr>
+                </a:solidFill>
+              </a:rPr>
+              <a:t>struggle with performance issues</a:t>
+            </a:r>
+            <a:r>
+              <a:rPr lang="en-US" sz="1600" dirty="0"/>
+              <a:t>, especially with very large datasets. Its performance typically degrades as the size of the data grows beyond the memory capacity of a single machine.</a:t>
             </a:r>
           </a:p>
           <a:p>
@@ -4569,7 +5498,31 @@
             </a:r>
             <a:r>
               <a:rPr lang="en-US" sz="1600" dirty="0"/>
-              <a:t>: Designed to handle large datasets more efficiently, it uses a multi-threaded approach and is built on Rust, which gives it speed and memory efficiency advantages over pandas. Polars is often faster for large datasets and complex data manipulations.</a:t>
+              <a:t>: Designed to </a:t>
+            </a:r>
+            <a:r>
+              <a:rPr lang="en-US" sz="1600" dirty="0">
+                <a:solidFill>
+                  <a:schemeClr val="accent6"/>
+                </a:solidFill>
+              </a:rPr>
+              <a:t>handle large datasets more efficiently</a:t>
+            </a:r>
+            <a:r>
+              <a:rPr lang="en-US" sz="1600" dirty="0"/>
+              <a:t>, it uses a </a:t>
+            </a:r>
+            <a:r>
+              <a:rPr lang="en-US" sz="1600" dirty="0">
+                <a:solidFill>
+                  <a:schemeClr val="accent6"/>
+                </a:solidFill>
+              </a:rPr>
+              <a:t>multi-threaded approach</a:t>
+            </a:r>
+            <a:r>
+              <a:rPr lang="en-US" sz="1600" dirty="0"/>
+              <a:t> which gives it speed and memory efficiency advantages over pandas. Polars is often faster for large datasets and complex data manipulations.</a:t>
             </a:r>
           </a:p>
           <a:p>
@@ -4597,7 +5550,19 @@
             </a:r>
             <a:r>
               <a:rPr lang="en-US" sz="1600" dirty="0"/>
-              <a:t>: Has a well-established, intuitive API that is deeply integrated into the Python data science ecosystem. It offers a broad range of functionalities and is often the first choice for data manipulation tasks in Python.</a:t>
+              <a:t>: Has a well-established, intuitive API that is deeply integrated into the Python data science ecosystem. It offers a broad range of functionalities and is often the </a:t>
+            </a:r>
+            <a:r>
+              <a:rPr lang="en-US" sz="1600" dirty="0">
+                <a:solidFill>
+                  <a:schemeClr val="accent6"/>
+                </a:solidFill>
+              </a:rPr>
+              <a:t>first choice for data manipulation </a:t>
+            </a:r>
+            <a:r>
+              <a:rPr lang="en-US" sz="1600" dirty="0"/>
+              <a:t>tasks in Python.</a:t>
             </a:r>
           </a:p>
           <a:p>
@@ -4611,7 +5576,19 @@
             </a:r>
             <a:r>
               <a:rPr lang="en-US" sz="1600" dirty="0"/>
-              <a:t>: While it provides an API similar to pandas to ease transition, it also introduces a unique expression system for lazy computations, which can be more verbose but allows for more optimized workflows.</a:t>
+              <a:t>: While it provides an API similar to pandas to ease transition, it also introduces a unique expression </a:t>
+            </a:r>
+            <a:r>
+              <a:rPr lang="en-US" sz="1600" dirty="0">
+                <a:solidFill>
+                  <a:schemeClr val="accent6"/>
+                </a:solidFill>
+              </a:rPr>
+              <a:t>system for lazy computations</a:t>
+            </a:r>
+            <a:r>
+              <a:rPr lang="en-US" sz="1600" dirty="0"/>
+              <a:t>, which can be more verbose but allows for more optimized workflows.</a:t>
             </a:r>
           </a:p>
         </p:txBody>
@@ -4629,7 +5606,7 @@
 </p:sld>
 </file>
 
-<file path=ppt/slides/slide6.xml><?xml version="1.0" encoding="utf-8"?>
+<file path=ppt/slides/slide7.xml><?xml version="1.0" encoding="utf-8"?>
 <p:sld xmlns:a="http://schemas.openxmlformats.org/drawingml/2006/main" xmlns:r="http://schemas.openxmlformats.org/officeDocument/2006/relationships" xmlns:p="http://schemas.openxmlformats.org/presentationml/2006/main">
   <p:cSld>
     <p:spTree>
@@ -4665,6 +5642,1497 @@
             <p:extLst>
               <p:ext uri="{D42A27DB-BD31-4B8C-83A1-F6EECF244321}">
                 <p14:modId xmlns:p14="http://schemas.microsoft.com/office/powerpoint/2010/main" val="3010613836"/>
+              </p:ext>
+            </p:extLst>
+          </p:nvPr>
+        </p:nvGraphicFramePr>
+        <p:xfrm>
+          <a:off x="1588" y="1588"/>
+          <a:ext cx="1588" cy="1588"/>
+        </p:xfrm>
+        <a:graphic>
+          <a:graphicData uri="http://schemas.openxmlformats.org/presentationml/2006/ole">
+            <mc:AlternateContent xmlns:mc="http://schemas.openxmlformats.org/markup-compatibility/2006">
+              <mc:Choice xmlns:v="urn:schemas-microsoft-com:vml" Requires="v">
+                <p:oleObj name="think-cell Slide" r:id="rId4" imgW="606" imgH="608" progId="TCLayout.ActiveDocument.1">
+                  <p:embed/>
+                </p:oleObj>
+              </mc:Choice>
+              <mc:Fallback>
+                <p:oleObj name="think-cell Slide" r:id="rId4" imgW="606" imgH="608" progId="TCLayout.ActiveDocument.1">
+                  <p:embed/>
+                  <p:pic>
+                    <p:nvPicPr>
+                      <p:cNvPr id="0" name=""/>
+                      <p:cNvPicPr/>
+                      <p:nvPr/>
+                    </p:nvPicPr>
+                    <p:blipFill>
+                      <a:blip r:embed="rId5"/>
+                      <a:stretch>
+                        <a:fillRect/>
+                      </a:stretch>
+                    </p:blipFill>
+                    <p:spPr>
+                      <a:xfrm>
+                        <a:off x="1588" y="1588"/>
+                        <a:ext cx="1588" cy="1588"/>
+                      </a:xfrm>
+                      <a:prstGeom prst="rect">
+                        <a:avLst/>
+                      </a:prstGeom>
+                    </p:spPr>
+                  </p:pic>
+                </p:oleObj>
+              </mc:Fallback>
+            </mc:AlternateContent>
+          </a:graphicData>
+        </a:graphic>
+      </p:graphicFrame>
+      <p:sp>
+        <p:nvSpPr>
+          <p:cNvPr id="2" name="Title 1">
+            <a:extLst>
+              <a:ext uri="{FF2B5EF4-FFF2-40B4-BE49-F238E27FC236}">
+                <a16:creationId xmlns:a16="http://schemas.microsoft.com/office/drawing/2014/main" id="{DCE867F3-30E0-37E7-488E-6BE9A6E91C25}"/>
+              </a:ext>
+            </a:extLst>
+          </p:cNvPr>
+          <p:cNvSpPr>
+            <a:spLocks noGrp="1"/>
+          </p:cNvSpPr>
+          <p:nvPr>
+            <p:ph type="title"/>
+          </p:nvPr>
+        </p:nvSpPr>
+        <p:spPr/>
+        <p:txBody>
+          <a:bodyPr vert="horz"/>
+          <a:lstStyle/>
+          <a:p>
+            <a:r>
+              <a:rPr lang="en-US" dirty="0"/>
+              <a:t>How is Polars Different than Pandas</a:t>
+            </a:r>
+          </a:p>
+        </p:txBody>
+      </p:sp>
+      <p:sp>
+        <p:nvSpPr>
+          <p:cNvPr id="3" name="Content Placeholder 2">
+            <a:extLst>
+              <a:ext uri="{FF2B5EF4-FFF2-40B4-BE49-F238E27FC236}">
+                <a16:creationId xmlns:a16="http://schemas.microsoft.com/office/drawing/2014/main" id="{42C74013-65C0-05E9-D9DC-44FA6E5CA71D}"/>
+              </a:ext>
+            </a:extLst>
+          </p:cNvPr>
+          <p:cNvSpPr>
+            <a:spLocks noGrp="1"/>
+          </p:cNvSpPr>
+          <p:nvPr>
+            <p:ph idx="1"/>
+          </p:nvPr>
+        </p:nvSpPr>
+        <p:spPr>
+          <a:xfrm>
+            <a:off x="838200" y="1529862"/>
+            <a:ext cx="10515600" cy="4647101"/>
+          </a:xfrm>
+        </p:spPr>
+        <p:txBody>
+          <a:bodyPr/>
+          <a:lstStyle/>
+          <a:p>
+            <a:pPr>
+              <a:buFont typeface="+mj-lt"/>
+              <a:buAutoNum type="arabicPeriod"/>
+            </a:pPr>
+            <a:r>
+              <a:rPr lang="en-US" sz="1600" b="1" dirty="0"/>
+              <a:t>Data Handling and Storage</a:t>
+            </a:r>
+            <a:r>
+              <a:rPr lang="en-US" sz="1600" dirty="0"/>
+              <a:t>:</a:t>
+            </a:r>
+          </a:p>
+          <a:p>
+            <a:pPr marL="742950" lvl="1" indent="-285750">
+              <a:buFont typeface="+mj-lt"/>
+              <a:buAutoNum type="arabicPeriod"/>
+            </a:pPr>
+            <a:r>
+              <a:rPr lang="en-US" sz="1600" b="1" dirty="0"/>
+              <a:t>Pandas</a:t>
+            </a:r>
+            <a:r>
+              <a:rPr lang="en-US" sz="1600" dirty="0"/>
+              <a:t>: Uses an </a:t>
+            </a:r>
+            <a:r>
+              <a:rPr lang="en-US" sz="1600" dirty="0">
+                <a:solidFill>
+                  <a:schemeClr val="accent2">
+                    <a:lumMod val="75000"/>
+                  </a:schemeClr>
+                </a:solidFill>
+              </a:rPr>
+              <a:t>in-memory row-based </a:t>
+            </a:r>
+            <a:r>
+              <a:rPr lang="en-US" sz="1600" dirty="0" err="1">
+                <a:solidFill>
+                  <a:schemeClr val="accent2">
+                    <a:lumMod val="75000"/>
+                  </a:schemeClr>
+                </a:solidFill>
+              </a:rPr>
+              <a:t>DataFrame</a:t>
+            </a:r>
+            <a:r>
+              <a:rPr lang="en-US" sz="1600" dirty="0">
+                <a:solidFill>
+                  <a:schemeClr val="accent2">
+                    <a:lumMod val="75000"/>
+                  </a:schemeClr>
+                </a:solidFill>
+              </a:rPr>
+              <a:t> which can lead to inefficiencies </a:t>
+            </a:r>
+            <a:r>
+              <a:rPr lang="en-US" sz="1600" dirty="0"/>
+              <a:t>when dealing with large datasets or when performing operations that are naturally columnar.</a:t>
+            </a:r>
+          </a:p>
+          <a:p>
+            <a:pPr marL="742950" lvl="1" indent="-285750">
+              <a:buFont typeface="+mj-lt"/>
+              <a:buAutoNum type="arabicPeriod"/>
+            </a:pPr>
+            <a:r>
+              <a:rPr lang="en-US" sz="1600" b="1" dirty="0"/>
+              <a:t>Polars</a:t>
+            </a:r>
+            <a:r>
+              <a:rPr lang="en-US" sz="1600" dirty="0"/>
+              <a:t>: Utilizes a </a:t>
+            </a:r>
+            <a:r>
+              <a:rPr lang="en-US" sz="1600" dirty="0">
+                <a:solidFill>
+                  <a:schemeClr val="accent6"/>
+                </a:solidFill>
+              </a:rPr>
+              <a:t>columnar storage format</a:t>
+            </a:r>
+            <a:r>
+              <a:rPr lang="en-US" sz="1600" dirty="0"/>
+              <a:t>, which is more efficient for many types of operations and is better for optimizing memory usage during computations.</a:t>
+            </a:r>
+          </a:p>
+          <a:p>
+            <a:pPr>
+              <a:buFont typeface="+mj-lt"/>
+              <a:buAutoNum type="arabicPeriod"/>
+            </a:pPr>
+            <a:r>
+              <a:rPr lang="en-US" sz="1600" b="1" dirty="0"/>
+              <a:t>Concurrency and Parallelism</a:t>
+            </a:r>
+            <a:r>
+              <a:rPr lang="en-US" sz="1600" dirty="0"/>
+              <a:t>:</a:t>
+            </a:r>
+          </a:p>
+          <a:p>
+            <a:pPr marL="742950" lvl="1" indent="-285750">
+              <a:buFont typeface="+mj-lt"/>
+              <a:buAutoNum type="arabicPeriod"/>
+            </a:pPr>
+            <a:r>
+              <a:rPr lang="en-US" sz="1600" b="1" dirty="0"/>
+              <a:t>Pandas</a:t>
+            </a:r>
+            <a:r>
+              <a:rPr lang="en-US" sz="1600" dirty="0"/>
+              <a:t>: Operates in a </a:t>
+            </a:r>
+            <a:r>
+              <a:rPr lang="en-US" sz="1600" dirty="0">
+                <a:solidFill>
+                  <a:schemeClr val="accent2">
+                    <a:lumMod val="75000"/>
+                  </a:schemeClr>
+                </a:solidFill>
+              </a:rPr>
+              <a:t>single-threaded</a:t>
+            </a:r>
+            <a:r>
+              <a:rPr lang="en-US" sz="1600" dirty="0"/>
+              <a:t> manner, which means it does not naturally take advantage of multi-core CPUs without external tools like </a:t>
+            </a:r>
+            <a:r>
+              <a:rPr lang="en-US" sz="1600" dirty="0" err="1"/>
+              <a:t>Dask</a:t>
+            </a:r>
+            <a:r>
+              <a:rPr lang="en-US" sz="1600" dirty="0"/>
+              <a:t>.</a:t>
+            </a:r>
+          </a:p>
+          <a:p>
+            <a:pPr marL="742950" lvl="1" indent="-285750">
+              <a:buFont typeface="+mj-lt"/>
+              <a:buAutoNum type="arabicPeriod"/>
+            </a:pPr>
+            <a:r>
+              <a:rPr lang="en-US" sz="1600" b="1" dirty="0"/>
+              <a:t>Polars</a:t>
+            </a:r>
+            <a:r>
+              <a:rPr lang="en-US" sz="1600" dirty="0"/>
+              <a:t>: Built from the ground up to support </a:t>
+            </a:r>
+            <a:r>
+              <a:rPr lang="en-US" sz="1600" dirty="0">
+                <a:solidFill>
+                  <a:schemeClr val="accent6"/>
+                </a:solidFill>
+              </a:rPr>
+              <a:t>multi-threading, </a:t>
+            </a:r>
+            <a:r>
+              <a:rPr lang="en-US" sz="1600" dirty="0"/>
+              <a:t>allowing it to perform operations in parallel and thus significantly speeding up data processing tasks on multi-core machines.</a:t>
+            </a:r>
+          </a:p>
+          <a:p>
+            <a:pPr>
+              <a:buFont typeface="+mj-lt"/>
+              <a:buAutoNum type="arabicPeriod"/>
+            </a:pPr>
+            <a:r>
+              <a:rPr lang="en-US" sz="1600" b="1" dirty="0"/>
+              <a:t>Lazy Evaluation</a:t>
+            </a:r>
+            <a:r>
+              <a:rPr lang="en-US" sz="1600" dirty="0"/>
+              <a:t>:</a:t>
+            </a:r>
+          </a:p>
+          <a:p>
+            <a:pPr marL="742950" lvl="1" indent="-285750">
+              <a:buFont typeface="+mj-lt"/>
+              <a:buAutoNum type="arabicPeriod"/>
+            </a:pPr>
+            <a:r>
+              <a:rPr lang="en-US" sz="1600" b="1" dirty="0"/>
+              <a:t>Pandas</a:t>
+            </a:r>
+            <a:r>
+              <a:rPr lang="en-US" sz="1600" dirty="0"/>
+              <a:t>: Executes operations immediately when called, which can be </a:t>
+            </a:r>
+            <a:r>
+              <a:rPr lang="en-US" sz="1600" dirty="0">
+                <a:solidFill>
+                  <a:schemeClr val="accent2">
+                    <a:lumMod val="75000"/>
+                  </a:schemeClr>
+                </a:solidFill>
+              </a:rPr>
+              <a:t>inefficient in cases where multiple operations are chained together.</a:t>
+            </a:r>
+          </a:p>
+          <a:p>
+            <a:pPr marL="742950" lvl="1" indent="-285750">
+              <a:buFont typeface="+mj-lt"/>
+              <a:buAutoNum type="arabicPeriod"/>
+            </a:pPr>
+            <a:r>
+              <a:rPr lang="en-US" sz="1600" b="1" dirty="0"/>
+              <a:t>Polars</a:t>
+            </a:r>
+            <a:r>
+              <a:rPr lang="en-US" sz="1600" dirty="0"/>
+              <a:t>: Supports lazy evaluation where operations are not executed immediately but are </a:t>
+            </a:r>
+            <a:r>
+              <a:rPr lang="en-US" sz="1600" dirty="0">
+                <a:solidFill>
+                  <a:schemeClr val="accent6"/>
+                </a:solidFill>
+              </a:rPr>
+              <a:t>optimized and executed only when needed.</a:t>
+            </a:r>
+            <a:r>
+              <a:rPr lang="en-US" sz="1600" dirty="0"/>
+              <a:t> This can lead to better performance especially in complex data pipelines.</a:t>
+            </a:r>
+          </a:p>
+          <a:p>
+            <a:pPr>
+              <a:buFont typeface="+mj-lt"/>
+              <a:buAutoNum type="arabicPeriod"/>
+            </a:pPr>
+            <a:r>
+              <a:rPr lang="en-US" sz="1600" b="1" dirty="0"/>
+              <a:t>Memory Management</a:t>
+            </a:r>
+            <a:r>
+              <a:rPr lang="en-US" sz="1600" dirty="0"/>
+              <a:t>:</a:t>
+            </a:r>
+          </a:p>
+          <a:p>
+            <a:pPr marL="742950" lvl="1" indent="-285750">
+              <a:buFont typeface="+mj-lt"/>
+              <a:buAutoNum type="arabicPeriod"/>
+            </a:pPr>
+            <a:r>
+              <a:rPr lang="en-US" sz="1600" b="1" dirty="0"/>
+              <a:t>Pandas</a:t>
+            </a:r>
+            <a:r>
+              <a:rPr lang="en-US" sz="1600" dirty="0"/>
+              <a:t>: Can </a:t>
+            </a:r>
+            <a:r>
+              <a:rPr lang="en-US" sz="1600" dirty="0">
+                <a:solidFill>
+                  <a:schemeClr val="accent2">
+                    <a:lumMod val="75000"/>
+                  </a:schemeClr>
+                </a:solidFill>
+              </a:rPr>
+              <a:t>sometimes use memory inefficiently</a:t>
+            </a:r>
+            <a:r>
+              <a:rPr lang="en-US" sz="1600" dirty="0"/>
+              <a:t>, particularly with operations that involve copying data.</a:t>
+            </a:r>
+          </a:p>
+          <a:p>
+            <a:pPr marL="742950" lvl="1" indent="-285750">
+              <a:buFont typeface="+mj-lt"/>
+              <a:buAutoNum type="arabicPeriod"/>
+            </a:pPr>
+            <a:r>
+              <a:rPr lang="en-US" sz="1600" b="1" dirty="0"/>
+              <a:t>Polars</a:t>
+            </a:r>
+            <a:r>
+              <a:rPr lang="en-US" sz="1600" dirty="0"/>
+              <a:t>: More </a:t>
+            </a:r>
+            <a:r>
+              <a:rPr lang="en-US" sz="1600" dirty="0">
+                <a:solidFill>
+                  <a:schemeClr val="accent6"/>
+                </a:solidFill>
+              </a:rPr>
+              <a:t>efficient with memory due to its columnar approach </a:t>
+            </a:r>
+            <a:r>
+              <a:rPr lang="en-US" sz="1600" dirty="0"/>
+              <a:t>and built-in optimizations that minimize unnecessary data duplication.</a:t>
+            </a:r>
+          </a:p>
+          <a:p>
+            <a:endParaRPr lang="en-US" dirty="0"/>
+          </a:p>
+        </p:txBody>
+      </p:sp>
+    </p:spTree>
+    <p:extLst>
+      <p:ext uri="{BB962C8B-B14F-4D97-AF65-F5344CB8AC3E}">
+        <p14:creationId xmlns:p14="http://schemas.microsoft.com/office/powerpoint/2010/main" val="3707181718"/>
+      </p:ext>
+    </p:extLst>
+  </p:cSld>
+  <p:clrMapOvr>
+    <a:masterClrMapping/>
+  </p:clrMapOvr>
+</p:sld>
+</file>
+
+<file path=ppt/slides/slide8.xml><?xml version="1.0" encoding="utf-8"?>
+<p:sld xmlns:a="http://schemas.openxmlformats.org/drawingml/2006/main" xmlns:r="http://schemas.openxmlformats.org/officeDocument/2006/relationships" xmlns:p="http://schemas.openxmlformats.org/presentationml/2006/main">
+  <p:cSld>
+    <p:bg>
+      <p:bgPr>
+        <a:solidFill>
+          <a:schemeClr val="bg1"/>
+        </a:solidFill>
+        <a:effectLst/>
+      </p:bgPr>
+    </p:bg>
+    <p:spTree>
+      <p:nvGrpSpPr>
+        <p:cNvPr id="1" name=""/>
+        <p:cNvGrpSpPr/>
+        <p:nvPr/>
+      </p:nvGrpSpPr>
+      <p:grpSpPr>
+        <a:xfrm>
+          <a:off x="0" y="0"/>
+          <a:ext cx="0" cy="0"/>
+          <a:chOff x="0" y="0"/>
+          <a:chExt cx="0" cy="0"/>
+        </a:xfrm>
+      </p:grpSpPr>
+      <p:graphicFrame>
+        <p:nvGraphicFramePr>
+          <p:cNvPr id="5" name="think-cell data - do not delete" hidden="1">
+            <a:extLst>
+              <a:ext uri="{FF2B5EF4-FFF2-40B4-BE49-F238E27FC236}">
+                <a16:creationId xmlns:a16="http://schemas.microsoft.com/office/drawing/2014/main" id="{F59E26FC-F348-965D-430F-3591BFC5EEB8}"/>
+              </a:ext>
+            </a:extLst>
+          </p:cNvPr>
+          <p:cNvGraphicFramePr>
+            <a:graphicFrameLocks noChangeAspect="1"/>
+          </p:cNvGraphicFramePr>
+          <p:nvPr>
+            <p:custDataLst>
+              <p:tags r:id="rId1"/>
+            </p:custDataLst>
+            <p:extLst>
+              <p:ext uri="{D42A27DB-BD31-4B8C-83A1-F6EECF244321}">
+                <p14:modId xmlns:p14="http://schemas.microsoft.com/office/powerpoint/2010/main" val="2685078631"/>
+              </p:ext>
+            </p:extLst>
+          </p:nvPr>
+        </p:nvGraphicFramePr>
+        <p:xfrm>
+          <a:off x="1588" y="1588"/>
+          <a:ext cx="1588" cy="1588"/>
+        </p:xfrm>
+        <a:graphic>
+          <a:graphicData uri="http://schemas.openxmlformats.org/presentationml/2006/ole">
+            <mc:AlternateContent xmlns:mc="http://schemas.openxmlformats.org/markup-compatibility/2006">
+              <mc:Choice xmlns:v="urn:schemas-microsoft-com:vml" Requires="v">
+                <p:oleObj name="think-cell Slide" r:id="rId3" imgW="360" imgH="360" progId="TCLayout.ActiveDocument.1">
+                  <p:embed/>
+                </p:oleObj>
+              </mc:Choice>
+              <mc:Fallback>
+                <p:oleObj name="think-cell Slide" r:id="rId3" imgW="360" imgH="360" progId="TCLayout.ActiveDocument.1">
+                  <p:embed/>
+                  <p:pic>
+                    <p:nvPicPr>
+                      <p:cNvPr id="0" name=""/>
+                      <p:cNvPicPr/>
+                      <p:nvPr/>
+                    </p:nvPicPr>
+                    <p:blipFill>
+                      <a:blip r:embed="rId4"/>
+                      <a:stretch>
+                        <a:fillRect/>
+                      </a:stretch>
+                    </p:blipFill>
+                    <p:spPr>
+                      <a:xfrm>
+                        <a:off x="1588" y="1588"/>
+                        <a:ext cx="1588" cy="1588"/>
+                      </a:xfrm>
+                      <a:prstGeom prst="rect">
+                        <a:avLst/>
+                      </a:prstGeom>
+                    </p:spPr>
+                  </p:pic>
+                </p:oleObj>
+              </mc:Fallback>
+            </mc:AlternateContent>
+          </a:graphicData>
+        </a:graphic>
+      </p:graphicFrame>
+      <p:sp useBgFill="1">
+        <p:nvSpPr>
+          <p:cNvPr id="9" name="Rectangle 8">
+            <a:extLst>
+              <a:ext uri="{FF2B5EF4-FFF2-40B4-BE49-F238E27FC236}">
+                <a16:creationId xmlns:a16="http://schemas.microsoft.com/office/drawing/2014/main" id="{963038BC-9FCB-466B-8EE5-7B0DC8F25C95}"/>
+              </a:ext>
+              <a:ext uri="{C183D7F6-B498-43B3-948B-1728B52AA6E4}">
+                <adec:decorative xmlns:adec="http://schemas.microsoft.com/office/drawing/2017/decorative" val="1"/>
+              </a:ext>
+            </a:extLst>
+          </p:cNvPr>
+          <p:cNvSpPr>
+            <a:spLocks noGrp="1" noRot="1" noChangeAspect="1" noMove="1" noResize="1" noEditPoints="1" noAdjustHandles="1" noChangeArrowheads="1" noChangeShapeType="1" noTextEdit="1"/>
+          </p:cNvSpPr>
+          <p:nvPr>
+            <p:extLst>
+              <p:ext uri="{386F3935-93C4-4BCD-93E2-E3B085C9AB24}">
+                <p16:designElem xmlns:p16="http://schemas.microsoft.com/office/powerpoint/2015/main" val="1"/>
+              </p:ext>
+            </p:extLst>
+          </p:nvPr>
+        </p:nvSpPr>
+        <p:spPr>
+          <a:xfrm>
+            <a:off x="0" y="0"/>
+            <a:ext cx="12192000" cy="6858000"/>
+          </a:xfrm>
+          <a:prstGeom prst="rect">
+            <a:avLst/>
+          </a:prstGeom>
+          <a:ln w="12700" cap="flat" cmpd="sng" algn="ctr">
+            <a:noFill/>
+            <a:prstDash val="solid"/>
+            <a:miter lim="800000"/>
+          </a:ln>
+          <a:effectLst/>
+          <a:extLst>
+            <a:ext uri="{91240B29-F687-4F45-9708-019B960494DF}">
+              <a14:hiddenLine xmlns:a14="http://schemas.microsoft.com/office/drawing/2010/main" w="12700" cap="flat" cmpd="sng" algn="ctr">
+                <a:solidFill>
+                  <a:schemeClr val="accent1">
+                    <a:shade val="50000"/>
+                  </a:schemeClr>
+                </a:solidFill>
+                <a:prstDash val="solid"/>
+                <a:miter lim="800000"/>
+              </a14:hiddenLine>
+            </a:ext>
+          </a:extLst>
+        </p:spPr>
+        <p:style>
+          <a:lnRef idx="2">
+            <a:schemeClr val="accent1">
+              <a:shade val="50000"/>
+            </a:schemeClr>
+          </a:lnRef>
+          <a:fillRef idx="1">
+            <a:schemeClr val="accent1"/>
+          </a:fillRef>
+          <a:effectRef idx="0">
+            <a:schemeClr val="accent1"/>
+          </a:effectRef>
+          <a:fontRef idx="minor">
+            <a:schemeClr val="lt1"/>
+          </a:fontRef>
+        </p:style>
+        <p:txBody>
+          <a:bodyPr rtlCol="0" anchor="ctr"/>
+          <a:lstStyle/>
+          <a:p>
+            <a:pPr algn="ctr"/>
+            <a:endParaRPr lang="en-US"/>
+          </a:p>
+        </p:txBody>
+      </p:sp>
+      <p:sp>
+        <p:nvSpPr>
+          <p:cNvPr id="11" name="Rectangle 10">
+            <a:extLst>
+              <a:ext uri="{FF2B5EF4-FFF2-40B4-BE49-F238E27FC236}">
+                <a16:creationId xmlns:a16="http://schemas.microsoft.com/office/drawing/2014/main" id="{058F4797-C77D-4821-B8FF-057D7524C62D}"/>
+              </a:ext>
+              <a:ext uri="{C183D7F6-B498-43B3-948B-1728B52AA6E4}">
+                <adec:decorative xmlns:adec="http://schemas.microsoft.com/office/drawing/2017/decorative" val="1"/>
+              </a:ext>
+            </a:extLst>
+          </p:cNvPr>
+          <p:cNvSpPr>
+            <a:spLocks noGrp="1" noRot="1" noChangeAspect="1" noMove="1" noResize="1" noEditPoints="1" noAdjustHandles="1" noChangeArrowheads="1" noChangeShapeType="1" noTextEdit="1"/>
+          </p:cNvSpPr>
+          <p:nvPr>
+            <p:extLst>
+              <p:ext uri="{386F3935-93C4-4BCD-93E2-E3B085C9AB24}">
+                <p16:designElem xmlns:p16="http://schemas.microsoft.com/office/powerpoint/2015/main" val="1"/>
+              </p:ext>
+            </p:extLst>
+          </p:nvPr>
+        </p:nvSpPr>
+        <p:spPr>
+          <a:xfrm>
+            <a:off x="0" y="0"/>
+            <a:ext cx="12192000" cy="6858000"/>
+          </a:xfrm>
+          <a:prstGeom prst="rect">
+            <a:avLst/>
+          </a:prstGeom>
+          <a:solidFill>
+            <a:schemeClr val="accent2">
+              <a:lumMod val="20000"/>
+              <a:lumOff val="80000"/>
+            </a:schemeClr>
+          </a:solidFill>
+          <a:ln>
+            <a:noFill/>
+          </a:ln>
+        </p:spPr>
+        <p:style>
+          <a:lnRef idx="2">
+            <a:schemeClr val="accent1">
+              <a:shade val="50000"/>
+            </a:schemeClr>
+          </a:lnRef>
+          <a:fillRef idx="1">
+            <a:schemeClr val="accent1"/>
+          </a:fillRef>
+          <a:effectRef idx="0">
+            <a:schemeClr val="accent1"/>
+          </a:effectRef>
+          <a:fontRef idx="minor">
+            <a:schemeClr val="lt1"/>
+          </a:fontRef>
+        </p:style>
+        <p:txBody>
+          <a:bodyPr rtlCol="0" anchor="ctr"/>
+          <a:lstStyle/>
+          <a:p>
+            <a:pPr algn="ctr"/>
+            <a:endParaRPr lang="en-US"/>
+          </a:p>
+        </p:txBody>
+      </p:sp>
+      <p:sp>
+        <p:nvSpPr>
+          <p:cNvPr id="13" name="Rectangle 12">
+            <a:extLst>
+              <a:ext uri="{FF2B5EF4-FFF2-40B4-BE49-F238E27FC236}">
+                <a16:creationId xmlns:a16="http://schemas.microsoft.com/office/drawing/2014/main" id="{290CB3DB-B42E-47BF-A595-527CB329A21A}"/>
+              </a:ext>
+              <a:ext uri="{C183D7F6-B498-43B3-948B-1728B52AA6E4}">
+                <adec:decorative xmlns:adec="http://schemas.microsoft.com/office/drawing/2017/decorative" val="1"/>
+              </a:ext>
+            </a:extLst>
+          </p:cNvPr>
+          <p:cNvSpPr>
+            <a:spLocks noGrp="1" noRot="1" noChangeAspect="1" noMove="1" noResize="1" noEditPoints="1" noAdjustHandles="1" noChangeArrowheads="1" noChangeShapeType="1" noTextEdit="1"/>
+          </p:cNvSpPr>
+          <p:nvPr>
+            <p:extLst>
+              <p:ext uri="{386F3935-93C4-4BCD-93E2-E3B085C9AB24}">
+                <p16:designElem xmlns:p16="http://schemas.microsoft.com/office/powerpoint/2015/main" val="1"/>
+              </p:ext>
+            </p:extLst>
+          </p:nvPr>
+        </p:nvSpPr>
+        <p:spPr>
+          <a:xfrm>
+            <a:off x="695515" y="685800"/>
+            <a:ext cx="10800971" cy="5486400"/>
+          </a:xfrm>
+          <a:prstGeom prst="rect">
+            <a:avLst/>
+          </a:prstGeom>
+          <a:solidFill>
+            <a:schemeClr val="bg1"/>
+          </a:solidFill>
+          <a:ln>
+            <a:noFill/>
+          </a:ln>
+        </p:spPr>
+        <p:style>
+          <a:lnRef idx="2">
+            <a:schemeClr val="accent1">
+              <a:shade val="50000"/>
+            </a:schemeClr>
+          </a:lnRef>
+          <a:fillRef idx="1">
+            <a:schemeClr val="accent1"/>
+          </a:fillRef>
+          <a:effectRef idx="0">
+            <a:schemeClr val="accent1"/>
+          </a:effectRef>
+          <a:fontRef idx="minor">
+            <a:schemeClr val="lt1"/>
+          </a:fontRef>
+        </p:style>
+        <p:txBody>
+          <a:bodyPr rtlCol="0" anchor="ctr"/>
+          <a:lstStyle/>
+          <a:p>
+            <a:pPr algn="ctr"/>
+            <a:endParaRPr lang="en-US"/>
+          </a:p>
+        </p:txBody>
+      </p:sp>
+      <p:sp>
+        <p:nvSpPr>
+          <p:cNvPr id="2" name="Title 1">
+            <a:extLst>
+              <a:ext uri="{FF2B5EF4-FFF2-40B4-BE49-F238E27FC236}">
+                <a16:creationId xmlns:a16="http://schemas.microsoft.com/office/drawing/2014/main" id="{C5D7354B-B79E-9FD4-7FCD-0C2839D5FC1C}"/>
+              </a:ext>
+            </a:extLst>
+          </p:cNvPr>
+          <p:cNvSpPr>
+            <a:spLocks noGrp="1"/>
+          </p:cNvSpPr>
+          <p:nvPr>
+            <p:ph type="title"/>
+          </p:nvPr>
+        </p:nvSpPr>
+        <p:spPr>
+          <a:xfrm>
+            <a:off x="1449572" y="1036674"/>
+            <a:ext cx="9292856" cy="1371600"/>
+          </a:xfrm>
+        </p:spPr>
+        <p:txBody>
+          <a:bodyPr vert="horz">
+            <a:normAutofit/>
+          </a:bodyPr>
+          <a:lstStyle/>
+          <a:p>
+            <a:pPr algn="ctr"/>
+            <a:r>
+              <a:rPr lang="en-US" sz="3200" dirty="0">
+                <a:solidFill>
+                  <a:schemeClr val="tx1">
+                    <a:lumMod val="65000"/>
+                    <a:lumOff val="35000"/>
+                  </a:schemeClr>
+                </a:solidFill>
+              </a:rPr>
+              <a:t>Function Comparison</a:t>
+            </a:r>
+          </a:p>
+        </p:txBody>
+      </p:sp>
+      <p:sp>
+        <p:nvSpPr>
+          <p:cNvPr id="12" name="TextBox 11">
+            <a:extLst>
+              <a:ext uri="{FF2B5EF4-FFF2-40B4-BE49-F238E27FC236}">
+                <a16:creationId xmlns:a16="http://schemas.microsoft.com/office/drawing/2014/main" id="{F346C68E-3742-FAC5-46D0-CBC14B2D08BF}"/>
+              </a:ext>
+            </a:extLst>
+          </p:cNvPr>
+          <p:cNvSpPr txBox="1"/>
+          <p:nvPr/>
+        </p:nvSpPr>
+        <p:spPr>
+          <a:xfrm>
+            <a:off x="1009161" y="4526521"/>
+            <a:ext cx="4749801" cy="769441"/>
+          </a:xfrm>
+          <a:prstGeom prst="rect">
+            <a:avLst/>
+          </a:prstGeom>
+          <a:noFill/>
+        </p:spPr>
+        <p:txBody>
+          <a:bodyPr wrap="square">
+            <a:spAutoFit/>
+          </a:bodyPr>
+          <a:lstStyle/>
+          <a:p>
+            <a:r>
+              <a:rPr lang="en-US" sz="1100" dirty="0"/>
+              <a:t>Operation | 	</a:t>
+            </a:r>
+            <a:r>
+              <a:rPr lang="en-US" sz="1100" b="1" dirty="0"/>
+              <a:t>               Pandas 	</a:t>
+            </a:r>
+            <a:r>
+              <a:rPr lang="en-US" sz="1100" dirty="0"/>
+              <a:t>| </a:t>
+            </a:r>
+            <a:r>
+              <a:rPr lang="en-US" sz="1100" b="1" dirty="0"/>
+              <a:t>Polars</a:t>
+            </a:r>
+          </a:p>
+          <a:p>
+            <a:r>
+              <a:rPr lang="en-US" sz="1100" dirty="0"/>
+              <a:t>Create </a:t>
+            </a:r>
+            <a:r>
+              <a:rPr lang="en-US" sz="1100" dirty="0" err="1"/>
+              <a:t>DataFrame</a:t>
+            </a:r>
+            <a:r>
+              <a:rPr lang="en-US" sz="1100" dirty="0"/>
+              <a:t> |     </a:t>
+            </a:r>
+            <a:r>
+              <a:rPr lang="en-US" sz="1100" dirty="0" err="1"/>
+              <a:t>pd.DataFrame</a:t>
+            </a:r>
+            <a:r>
+              <a:rPr lang="en-US" sz="1100" dirty="0"/>
+              <a:t>(data)     	| </a:t>
+            </a:r>
+            <a:r>
+              <a:rPr lang="en-US" sz="1100" dirty="0" err="1"/>
+              <a:t>pl.DataFrame</a:t>
+            </a:r>
+            <a:r>
+              <a:rPr lang="en-US" sz="1100" dirty="0"/>
+              <a:t>(data)</a:t>
+            </a:r>
+          </a:p>
+          <a:p>
+            <a:r>
+              <a:rPr lang="en-US" sz="1100" dirty="0"/>
+              <a:t>Show schema / types | </a:t>
+            </a:r>
+            <a:r>
+              <a:rPr lang="en-US" sz="1100" dirty="0" err="1"/>
+              <a:t>df.dtypes</a:t>
+            </a:r>
+            <a:r>
+              <a:rPr lang="en-US" sz="1100" dirty="0"/>
+              <a:t> 	| </a:t>
+            </a:r>
+            <a:r>
+              <a:rPr lang="en-US" sz="1100" dirty="0" err="1"/>
+              <a:t>df.schema</a:t>
+            </a:r>
+            <a:endParaRPr lang="en-US" sz="1100" dirty="0"/>
+          </a:p>
+          <a:p>
+            <a:r>
+              <a:rPr lang="en-US" sz="1100" dirty="0"/>
+              <a:t>Head / Tail | </a:t>
+            </a:r>
+            <a:r>
+              <a:rPr lang="en-US" sz="1100" dirty="0" err="1"/>
+              <a:t>df.head</a:t>
+            </a:r>
+            <a:r>
+              <a:rPr lang="en-US" sz="1100" dirty="0"/>
+              <a:t>(), </a:t>
+            </a:r>
+            <a:r>
+              <a:rPr lang="en-US" sz="1100" dirty="0" err="1"/>
+              <a:t>df.tail</a:t>
+            </a:r>
+            <a:r>
+              <a:rPr lang="en-US" sz="1100" dirty="0"/>
+              <a:t>() 		| Same in Polars</a:t>
+            </a:r>
+          </a:p>
+        </p:txBody>
+      </p:sp>
+      <p:sp>
+        <p:nvSpPr>
+          <p:cNvPr id="20" name="TextBox 19">
+            <a:extLst>
+              <a:ext uri="{FF2B5EF4-FFF2-40B4-BE49-F238E27FC236}">
+                <a16:creationId xmlns:a16="http://schemas.microsoft.com/office/drawing/2014/main" id="{3D22AF83-BC9D-36D3-CD45-2FE1730D9EC9}"/>
+              </a:ext>
+            </a:extLst>
+          </p:cNvPr>
+          <p:cNvSpPr txBox="1"/>
+          <p:nvPr/>
+        </p:nvSpPr>
+        <p:spPr>
+          <a:xfrm>
+            <a:off x="1009161" y="2606293"/>
+            <a:ext cx="3677645" cy="938719"/>
+          </a:xfrm>
+          <a:prstGeom prst="rect">
+            <a:avLst/>
+          </a:prstGeom>
+          <a:noFill/>
+        </p:spPr>
+        <p:txBody>
+          <a:bodyPr wrap="square">
+            <a:spAutoFit/>
+          </a:bodyPr>
+          <a:lstStyle/>
+          <a:p>
+            <a:r>
+              <a:rPr lang="en-US" sz="1100" dirty="0"/>
+              <a:t>Operation | 	</a:t>
+            </a:r>
+            <a:r>
+              <a:rPr lang="en-US" sz="1100" b="1" dirty="0"/>
+              <a:t>Pandas </a:t>
+            </a:r>
+            <a:r>
+              <a:rPr lang="en-US" sz="1100" dirty="0"/>
+              <a:t>	    | </a:t>
+            </a:r>
+            <a:r>
+              <a:rPr lang="en-US" sz="1100" b="1" dirty="0"/>
+              <a:t>Polars</a:t>
+            </a:r>
+          </a:p>
+          <a:p>
+            <a:r>
+              <a:rPr lang="en-US" sz="1100" dirty="0"/>
+              <a:t>Read CSV | 	</a:t>
+            </a:r>
+            <a:r>
+              <a:rPr lang="en-US" sz="1100" dirty="0" err="1"/>
+              <a:t>pd.read_csv</a:t>
+            </a:r>
+            <a:r>
+              <a:rPr lang="en-US" sz="1100" dirty="0"/>
+              <a:t>() 	    | </a:t>
+            </a:r>
+            <a:r>
+              <a:rPr lang="en-US" sz="1100" dirty="0" err="1"/>
+              <a:t>pl.read_csv</a:t>
+            </a:r>
+            <a:r>
+              <a:rPr lang="en-US" sz="1100" dirty="0"/>
+              <a:t>()</a:t>
+            </a:r>
+          </a:p>
+          <a:p>
+            <a:r>
+              <a:rPr lang="en-US" sz="1100" dirty="0"/>
+              <a:t>Read JSON | 	</a:t>
+            </a:r>
+            <a:r>
+              <a:rPr lang="en-US" sz="1100" dirty="0" err="1"/>
+              <a:t>pd.read_json</a:t>
+            </a:r>
+            <a:r>
+              <a:rPr lang="en-US" sz="1100" dirty="0"/>
+              <a:t>()     | </a:t>
+            </a:r>
+            <a:r>
+              <a:rPr lang="en-US" sz="1100" dirty="0" err="1"/>
+              <a:t>pl.read_json</a:t>
+            </a:r>
+            <a:r>
+              <a:rPr lang="en-US" sz="1100" dirty="0"/>
+              <a:t>()</a:t>
+            </a:r>
+          </a:p>
+          <a:p>
+            <a:r>
+              <a:rPr lang="en-US" sz="1100" dirty="0"/>
+              <a:t>Write CSV | 	</a:t>
+            </a:r>
+            <a:r>
+              <a:rPr lang="en-US" sz="1100" dirty="0" err="1"/>
+              <a:t>df.to_csv</a:t>
+            </a:r>
+            <a:r>
+              <a:rPr lang="en-US" sz="1100" dirty="0"/>
+              <a:t>() 	   | </a:t>
+            </a:r>
+            <a:r>
+              <a:rPr lang="en-US" sz="1100" dirty="0" err="1"/>
+              <a:t>df.write_csv</a:t>
+            </a:r>
+            <a:r>
+              <a:rPr lang="en-US" sz="1100" dirty="0"/>
+              <a:t>()</a:t>
+            </a:r>
+          </a:p>
+          <a:p>
+            <a:r>
+              <a:rPr lang="en-US" sz="1100" dirty="0"/>
+              <a:t>Write Parquet | </a:t>
+            </a:r>
+            <a:r>
+              <a:rPr lang="en-US" sz="1100" dirty="0" err="1"/>
+              <a:t>df.to_parquet</a:t>
+            </a:r>
+            <a:r>
+              <a:rPr lang="en-US" sz="1100" dirty="0"/>
+              <a:t>()    | </a:t>
+            </a:r>
+            <a:r>
+              <a:rPr lang="en-US" sz="1100" dirty="0" err="1"/>
+              <a:t>df.write_parquet</a:t>
+            </a:r>
+            <a:r>
+              <a:rPr lang="en-US" sz="1100" dirty="0"/>
+              <a:t>()</a:t>
+            </a:r>
+          </a:p>
+        </p:txBody>
+      </p:sp>
+      <p:sp>
+        <p:nvSpPr>
+          <p:cNvPr id="23" name="TextBox 22">
+            <a:extLst>
+              <a:ext uri="{FF2B5EF4-FFF2-40B4-BE49-F238E27FC236}">
+                <a16:creationId xmlns:a16="http://schemas.microsoft.com/office/drawing/2014/main" id="{5937FB9A-91DB-5CA6-EA00-BFE41B08D331}"/>
+              </a:ext>
+            </a:extLst>
+          </p:cNvPr>
+          <p:cNvSpPr txBox="1"/>
+          <p:nvPr/>
+        </p:nvSpPr>
+        <p:spPr>
+          <a:xfrm>
+            <a:off x="5609766" y="2659559"/>
+            <a:ext cx="5132662" cy="769441"/>
+          </a:xfrm>
+          <a:prstGeom prst="rect">
+            <a:avLst/>
+          </a:prstGeom>
+          <a:noFill/>
+        </p:spPr>
+        <p:txBody>
+          <a:bodyPr wrap="square">
+            <a:spAutoFit/>
+          </a:bodyPr>
+          <a:lstStyle/>
+          <a:p>
+            <a:r>
+              <a:rPr lang="en-US" sz="1100" dirty="0"/>
+              <a:t>Operation | 	   </a:t>
+            </a:r>
+            <a:r>
+              <a:rPr lang="en-US" sz="1100" b="1" dirty="0"/>
+              <a:t>Pandas  </a:t>
+            </a:r>
+            <a:r>
+              <a:rPr lang="en-US" sz="1100" dirty="0"/>
+              <a:t>	         	| </a:t>
+            </a:r>
+            <a:r>
+              <a:rPr lang="en-US" sz="1100" b="1" dirty="0"/>
+              <a:t>Polars</a:t>
+            </a:r>
+          </a:p>
+          <a:p>
+            <a:r>
+              <a:rPr lang="en-US" sz="1100" dirty="0"/>
+              <a:t>Column select |  </a:t>
+            </a:r>
+            <a:r>
+              <a:rPr lang="en-US" sz="1100" dirty="0" err="1"/>
+              <a:t>df</a:t>
+            </a:r>
+            <a:r>
+              <a:rPr lang="en-US" sz="1100" dirty="0"/>
+              <a:t>['col']  	         	| </a:t>
+            </a:r>
+            <a:r>
+              <a:rPr lang="en-US" sz="1100" dirty="0" err="1"/>
+              <a:t>df.select</a:t>
+            </a:r>
+            <a:r>
+              <a:rPr lang="en-US" sz="1100" dirty="0"/>
+              <a:t>('col') or </a:t>
+            </a:r>
+            <a:r>
+              <a:rPr lang="en-US" sz="1100" dirty="0" err="1"/>
+              <a:t>df</a:t>
+            </a:r>
+            <a:r>
+              <a:rPr lang="en-US" sz="1100" dirty="0"/>
+              <a:t>['col']</a:t>
+            </a:r>
+          </a:p>
+          <a:p>
+            <a:r>
+              <a:rPr lang="en-US" sz="1100" dirty="0"/>
+              <a:t>Row filter | 	   </a:t>
+            </a:r>
+            <a:r>
+              <a:rPr lang="en-US" sz="1100" dirty="0" err="1"/>
+              <a:t>df</a:t>
+            </a:r>
+            <a:r>
+              <a:rPr lang="en-US" sz="1100" dirty="0"/>
+              <a:t>[</a:t>
+            </a:r>
+            <a:r>
+              <a:rPr lang="en-US" sz="1100" dirty="0" err="1"/>
+              <a:t>df</a:t>
+            </a:r>
+            <a:r>
+              <a:rPr lang="en-US" sz="1100" dirty="0"/>
+              <a:t>['col'] &gt; 10]     	| </a:t>
+            </a:r>
+            <a:r>
+              <a:rPr lang="en-US" sz="1100" dirty="0" err="1"/>
+              <a:t>df.filter</a:t>
+            </a:r>
+            <a:r>
+              <a:rPr lang="en-US" sz="1100" dirty="0"/>
+              <a:t>(</a:t>
+            </a:r>
+            <a:r>
+              <a:rPr lang="en-US" sz="1100" dirty="0" err="1"/>
+              <a:t>pl.col</a:t>
+            </a:r>
+            <a:r>
+              <a:rPr lang="en-US" sz="1100" dirty="0"/>
+              <a:t>('col') &gt; 10)</a:t>
+            </a:r>
+          </a:p>
+          <a:p>
+            <a:r>
+              <a:rPr lang="en-US" sz="1100" dirty="0"/>
+              <a:t>Multiple filters |   </a:t>
+            </a:r>
+            <a:r>
+              <a:rPr lang="en-US" sz="1100" dirty="0" err="1"/>
+              <a:t>df</a:t>
+            </a:r>
+            <a:r>
+              <a:rPr lang="en-US" sz="1100" dirty="0"/>
+              <a:t>[(cond1) &amp; (cond2)] 	| </a:t>
+            </a:r>
+            <a:r>
+              <a:rPr lang="en-US" sz="1100" dirty="0" err="1"/>
+              <a:t>df.filter</a:t>
+            </a:r>
+            <a:r>
+              <a:rPr lang="en-US" sz="1100" dirty="0"/>
+              <a:t>((cond1) &amp; (cond2))</a:t>
+            </a:r>
+          </a:p>
+        </p:txBody>
+      </p:sp>
+      <p:sp>
+        <p:nvSpPr>
+          <p:cNvPr id="26" name="TextBox 25">
+            <a:extLst>
+              <a:ext uri="{FF2B5EF4-FFF2-40B4-BE49-F238E27FC236}">
+                <a16:creationId xmlns:a16="http://schemas.microsoft.com/office/drawing/2014/main" id="{6B4FBF7E-0EBC-C16F-2FE0-F0570100797E}"/>
+              </a:ext>
+            </a:extLst>
+          </p:cNvPr>
+          <p:cNvSpPr txBox="1"/>
+          <p:nvPr/>
+        </p:nvSpPr>
+        <p:spPr>
+          <a:xfrm>
+            <a:off x="5609766" y="4526520"/>
+            <a:ext cx="5132661" cy="769441"/>
+          </a:xfrm>
+          <a:prstGeom prst="rect">
+            <a:avLst/>
+          </a:prstGeom>
+          <a:noFill/>
+        </p:spPr>
+        <p:txBody>
+          <a:bodyPr wrap="square">
+            <a:spAutoFit/>
+          </a:bodyPr>
+          <a:lstStyle/>
+          <a:p>
+            <a:r>
+              <a:rPr lang="en-US" sz="1100" dirty="0"/>
+              <a:t>Operation | 	</a:t>
+            </a:r>
+            <a:r>
+              <a:rPr lang="en-US" sz="1100" b="1" dirty="0"/>
+              <a:t>Pandas </a:t>
+            </a:r>
+            <a:r>
+              <a:rPr lang="en-US" sz="1100" dirty="0"/>
+              <a:t>		| </a:t>
+            </a:r>
+            <a:r>
+              <a:rPr lang="en-US" sz="1100" b="1" dirty="0"/>
+              <a:t>Polars</a:t>
+            </a:r>
+          </a:p>
+          <a:p>
+            <a:r>
+              <a:rPr lang="en-US" sz="1100" dirty="0"/>
+              <a:t>Merge | 	</a:t>
+            </a:r>
+            <a:r>
+              <a:rPr lang="en-US" sz="1100" dirty="0" err="1"/>
+              <a:t>pd.merge</a:t>
+            </a:r>
+            <a:r>
+              <a:rPr lang="en-US" sz="1100" dirty="0"/>
+              <a:t>(df1, df2, ...)	| df1.join(df2, on=..., how='...')</a:t>
+            </a:r>
+          </a:p>
+          <a:p>
+            <a:r>
+              <a:rPr lang="en-US" sz="1100" dirty="0"/>
+              <a:t>Join Types | 'inner', 'left', etc. 		| Same</a:t>
+            </a:r>
+          </a:p>
+          <a:p>
+            <a:r>
+              <a:rPr lang="en-US" sz="1100" dirty="0"/>
+              <a:t>As-of Join | </a:t>
+            </a:r>
+            <a:r>
+              <a:rPr lang="en-US" sz="1100" dirty="0" err="1"/>
+              <a:t>pd.merge_asof</a:t>
+            </a:r>
+            <a:r>
+              <a:rPr lang="en-US" sz="1100" dirty="0"/>
+              <a:t>() 		| df1.join_asof(df2, ...)</a:t>
+            </a:r>
+          </a:p>
+        </p:txBody>
+      </p:sp>
+      <p:cxnSp>
+        <p:nvCxnSpPr>
+          <p:cNvPr id="28" name="Straight Connector 27">
+            <a:extLst>
+              <a:ext uri="{FF2B5EF4-FFF2-40B4-BE49-F238E27FC236}">
+                <a16:creationId xmlns:a16="http://schemas.microsoft.com/office/drawing/2014/main" id="{00816505-E951-10F7-CEB2-BA6B1449C922}"/>
+              </a:ext>
+            </a:extLst>
+          </p:cNvPr>
+          <p:cNvCxnSpPr/>
+          <p:nvPr/>
+        </p:nvCxnSpPr>
+        <p:spPr>
+          <a:xfrm>
+            <a:off x="5424854" y="2476569"/>
+            <a:ext cx="0" cy="3499338"/>
+          </a:xfrm>
+          <a:prstGeom prst="line">
+            <a:avLst/>
+          </a:prstGeom>
+        </p:spPr>
+        <p:style>
+          <a:lnRef idx="2">
+            <a:schemeClr val="accent1"/>
+          </a:lnRef>
+          <a:fillRef idx="0">
+            <a:schemeClr val="accent1"/>
+          </a:fillRef>
+          <a:effectRef idx="1">
+            <a:schemeClr val="accent1"/>
+          </a:effectRef>
+          <a:fontRef idx="minor">
+            <a:schemeClr val="tx1"/>
+          </a:fontRef>
+        </p:style>
+      </p:cxnSp>
+      <p:cxnSp>
+        <p:nvCxnSpPr>
+          <p:cNvPr id="29" name="Straight Connector 28">
+            <a:extLst>
+              <a:ext uri="{FF2B5EF4-FFF2-40B4-BE49-F238E27FC236}">
+                <a16:creationId xmlns:a16="http://schemas.microsoft.com/office/drawing/2014/main" id="{5B56D1E4-DD08-4E51-7190-BA8257ACA491}"/>
+              </a:ext>
+            </a:extLst>
+          </p:cNvPr>
+          <p:cNvCxnSpPr>
+            <a:cxnSpLocks/>
+          </p:cNvCxnSpPr>
+          <p:nvPr/>
+        </p:nvCxnSpPr>
+        <p:spPr>
+          <a:xfrm>
+            <a:off x="1009161" y="3930162"/>
+            <a:ext cx="9207501" cy="26046"/>
+          </a:xfrm>
+          <a:prstGeom prst="line">
+            <a:avLst/>
+          </a:prstGeom>
+        </p:spPr>
+        <p:style>
+          <a:lnRef idx="2">
+            <a:schemeClr val="accent1"/>
+          </a:lnRef>
+          <a:fillRef idx="0">
+            <a:schemeClr val="accent1"/>
+          </a:fillRef>
+          <a:effectRef idx="1">
+            <a:schemeClr val="accent1"/>
+          </a:effectRef>
+          <a:fontRef idx="minor">
+            <a:schemeClr val="tx1"/>
+          </a:fontRef>
+        </p:style>
+      </p:cxnSp>
+      <p:sp>
+        <p:nvSpPr>
+          <p:cNvPr id="33" name="TextBox 32">
+            <a:extLst>
+              <a:ext uri="{FF2B5EF4-FFF2-40B4-BE49-F238E27FC236}">
+                <a16:creationId xmlns:a16="http://schemas.microsoft.com/office/drawing/2014/main" id="{61820266-9A33-62E6-CF53-442A2B010123}"/>
+              </a:ext>
+            </a:extLst>
+          </p:cNvPr>
+          <p:cNvSpPr txBox="1"/>
+          <p:nvPr/>
+        </p:nvSpPr>
+        <p:spPr>
+          <a:xfrm>
+            <a:off x="929787" y="2231517"/>
+            <a:ext cx="2921242" cy="369332"/>
+          </a:xfrm>
+          <a:prstGeom prst="rect">
+            <a:avLst/>
+          </a:prstGeom>
+          <a:noFill/>
+        </p:spPr>
+        <p:txBody>
+          <a:bodyPr wrap="square">
+            <a:spAutoFit/>
+          </a:bodyPr>
+          <a:lstStyle/>
+          <a:p>
+            <a:r>
+              <a:rPr lang="en-US" dirty="0"/>
+              <a:t>Data Loading / I/O</a:t>
+            </a:r>
+          </a:p>
+        </p:txBody>
+      </p:sp>
+      <p:sp>
+        <p:nvSpPr>
+          <p:cNvPr id="35" name="TextBox 34">
+            <a:extLst>
+              <a:ext uri="{FF2B5EF4-FFF2-40B4-BE49-F238E27FC236}">
+                <a16:creationId xmlns:a16="http://schemas.microsoft.com/office/drawing/2014/main" id="{CF395245-3B9C-14A9-6C81-F2E2707D68CA}"/>
+              </a:ext>
+            </a:extLst>
+          </p:cNvPr>
+          <p:cNvSpPr txBox="1"/>
+          <p:nvPr/>
+        </p:nvSpPr>
+        <p:spPr>
+          <a:xfrm>
+            <a:off x="5524869" y="2197176"/>
+            <a:ext cx="2947621" cy="369332"/>
+          </a:xfrm>
+          <a:prstGeom prst="rect">
+            <a:avLst/>
+          </a:prstGeom>
+          <a:noFill/>
+        </p:spPr>
+        <p:txBody>
+          <a:bodyPr wrap="square">
+            <a:spAutoFit/>
+          </a:bodyPr>
+          <a:lstStyle/>
+          <a:p>
+            <a:r>
+              <a:rPr lang="en-US" dirty="0"/>
+              <a:t>Data Selection &amp; Filtering</a:t>
+            </a:r>
+          </a:p>
+        </p:txBody>
+      </p:sp>
+      <p:sp>
+        <p:nvSpPr>
+          <p:cNvPr id="37" name="TextBox 36">
+            <a:extLst>
+              <a:ext uri="{FF2B5EF4-FFF2-40B4-BE49-F238E27FC236}">
+                <a16:creationId xmlns:a16="http://schemas.microsoft.com/office/drawing/2014/main" id="{C08E10C1-A1FB-F8D2-8611-BBE5015A4780}"/>
+              </a:ext>
+            </a:extLst>
+          </p:cNvPr>
+          <p:cNvSpPr txBox="1"/>
+          <p:nvPr/>
+        </p:nvSpPr>
+        <p:spPr>
+          <a:xfrm>
+            <a:off x="856619" y="4122737"/>
+            <a:ext cx="3277329" cy="369332"/>
+          </a:xfrm>
+          <a:prstGeom prst="rect">
+            <a:avLst/>
+          </a:prstGeom>
+          <a:noFill/>
+        </p:spPr>
+        <p:txBody>
+          <a:bodyPr wrap="square">
+            <a:spAutoFit/>
+          </a:bodyPr>
+          <a:lstStyle/>
+          <a:p>
+            <a:r>
+              <a:rPr lang="en-US" dirty="0" err="1"/>
+              <a:t>DataFrame</a:t>
+            </a:r>
+            <a:r>
+              <a:rPr lang="en-US" dirty="0"/>
+              <a:t> Creation &amp; Info</a:t>
+            </a:r>
+          </a:p>
+        </p:txBody>
+      </p:sp>
+      <p:sp>
+        <p:nvSpPr>
+          <p:cNvPr id="39" name="TextBox 38">
+            <a:extLst>
+              <a:ext uri="{FF2B5EF4-FFF2-40B4-BE49-F238E27FC236}">
+                <a16:creationId xmlns:a16="http://schemas.microsoft.com/office/drawing/2014/main" id="{09E1564C-D7E6-D755-BBCB-069AEBBECB3E}"/>
+              </a:ext>
+            </a:extLst>
+          </p:cNvPr>
+          <p:cNvSpPr txBox="1"/>
+          <p:nvPr/>
+        </p:nvSpPr>
+        <p:spPr>
+          <a:xfrm>
+            <a:off x="5609766" y="4088396"/>
+            <a:ext cx="2496737" cy="369332"/>
+          </a:xfrm>
+          <a:prstGeom prst="rect">
+            <a:avLst/>
+          </a:prstGeom>
+          <a:noFill/>
+        </p:spPr>
+        <p:txBody>
+          <a:bodyPr wrap="square">
+            <a:spAutoFit/>
+          </a:bodyPr>
+          <a:lstStyle/>
+          <a:p>
+            <a:r>
+              <a:rPr lang="en-US" dirty="0"/>
+              <a:t>Joining &amp; Merging</a:t>
+            </a:r>
+          </a:p>
+        </p:txBody>
+      </p:sp>
+    </p:spTree>
+    <p:extLst>
+      <p:ext uri="{BB962C8B-B14F-4D97-AF65-F5344CB8AC3E}">
+        <p14:creationId xmlns:p14="http://schemas.microsoft.com/office/powerpoint/2010/main" val="303857715"/>
+      </p:ext>
+    </p:extLst>
+  </p:cSld>
+  <p:clrMapOvr>
+    <a:masterClrMapping/>
+  </p:clrMapOvr>
+</p:sld>
+</file>
+
+<file path=ppt/slides/slide9.xml><?xml version="1.0" encoding="utf-8"?>
+<p:sld xmlns:a="http://schemas.openxmlformats.org/drawingml/2006/main" xmlns:r="http://schemas.openxmlformats.org/officeDocument/2006/relationships" xmlns:p="http://schemas.openxmlformats.org/presentationml/2006/main">
+  <p:cSld>
+    <p:spTree>
+      <p:nvGrpSpPr>
+        <p:cNvPr id="1" name=""/>
+        <p:cNvGrpSpPr/>
+        <p:nvPr/>
+      </p:nvGrpSpPr>
+      <p:grpSpPr>
+        <a:xfrm>
+          <a:off x="0" y="0"/>
+          <a:ext cx="0" cy="0"/>
+          <a:chOff x="0" y="0"/>
+          <a:chExt cx="0" cy="0"/>
+        </a:xfrm>
+      </p:grpSpPr>
+      <p:graphicFrame>
+        <p:nvGraphicFramePr>
+          <p:cNvPr id="4" name="think-cell data - do not delete" hidden="1">
+            <a:extLst>
+              <a:ext uri="{FF2B5EF4-FFF2-40B4-BE49-F238E27FC236}">
+                <a16:creationId xmlns:a16="http://schemas.microsoft.com/office/drawing/2014/main" id="{149FDA89-2BE7-F3B1-B947-20A4F2C245D8}"/>
+              </a:ext>
+            </a:extLst>
+          </p:cNvPr>
+          <p:cNvGraphicFramePr>
+            <a:graphicFrameLocks noChangeAspect="1"/>
+          </p:cNvGraphicFramePr>
+          <p:nvPr>
+            <p:custDataLst>
+              <p:tags r:id="rId1"/>
+            </p:custDataLst>
+            <p:extLst>
+              <p:ext uri="{D42A27DB-BD31-4B8C-83A1-F6EECF244321}">
+                <p14:modId xmlns:p14="http://schemas.microsoft.com/office/powerpoint/2010/main" val="753424000"/>
               </p:ext>
             </p:extLst>
           </p:nvPr>
@@ -4717,344 +7185,6 @@
           <p:cNvPr id="2" name="Title 1">
             <a:extLst>
               <a:ext uri="{FF2B5EF4-FFF2-40B4-BE49-F238E27FC236}">
-                <a16:creationId xmlns:a16="http://schemas.microsoft.com/office/drawing/2014/main" id="{DCE867F3-30E0-37E7-488E-6BE9A6E91C25}"/>
-              </a:ext>
-            </a:extLst>
-          </p:cNvPr>
-          <p:cNvSpPr>
-            <a:spLocks noGrp="1"/>
-          </p:cNvSpPr>
-          <p:nvPr>
-            <p:ph type="title"/>
-          </p:nvPr>
-        </p:nvSpPr>
-        <p:spPr/>
-        <p:txBody>
-          <a:bodyPr vert="horz"/>
-          <a:lstStyle/>
-          <a:p>
-            <a:r>
-              <a:rPr lang="en-US" dirty="0"/>
-              <a:t>How is Polars Different than Pandas</a:t>
-            </a:r>
-          </a:p>
-        </p:txBody>
-      </p:sp>
-      <p:sp>
-        <p:nvSpPr>
-          <p:cNvPr id="3" name="Content Placeholder 2">
-            <a:extLst>
-              <a:ext uri="{FF2B5EF4-FFF2-40B4-BE49-F238E27FC236}">
-                <a16:creationId xmlns:a16="http://schemas.microsoft.com/office/drawing/2014/main" id="{42C74013-65C0-05E9-D9DC-44FA6E5CA71D}"/>
-              </a:ext>
-            </a:extLst>
-          </p:cNvPr>
-          <p:cNvSpPr>
-            <a:spLocks noGrp="1"/>
-          </p:cNvSpPr>
-          <p:nvPr>
-            <p:ph idx="1"/>
-          </p:nvPr>
-        </p:nvSpPr>
-        <p:spPr>
-          <a:xfrm>
-            <a:off x="838200" y="1591408"/>
-            <a:ext cx="10515600" cy="4585555"/>
-          </a:xfrm>
-        </p:spPr>
-        <p:txBody>
-          <a:bodyPr/>
-          <a:lstStyle/>
-          <a:p>
-            <a:pPr>
-              <a:buFont typeface="+mj-lt"/>
-              <a:buAutoNum type="arabicPeriod"/>
-            </a:pPr>
-            <a:r>
-              <a:rPr lang="en-US" sz="1600" b="1" dirty="0"/>
-              <a:t>Data Handling and Storage</a:t>
-            </a:r>
-            <a:r>
-              <a:rPr lang="en-US" sz="1600" dirty="0"/>
-              <a:t>:</a:t>
-            </a:r>
-          </a:p>
-          <a:p>
-            <a:pPr marL="742950" lvl="1" indent="-285750">
-              <a:buFont typeface="+mj-lt"/>
-              <a:buAutoNum type="arabicPeriod"/>
-            </a:pPr>
-            <a:r>
-              <a:rPr lang="en-US" sz="1600" b="1" dirty="0"/>
-              <a:t>Pandas</a:t>
-            </a:r>
-            <a:r>
-              <a:rPr lang="en-US" sz="1600" dirty="0"/>
-              <a:t>: Uses an in-memory row-based </a:t>
-            </a:r>
-            <a:r>
-              <a:rPr lang="en-US" sz="1600" dirty="0" err="1"/>
-              <a:t>DataFrame</a:t>
-            </a:r>
-            <a:r>
-              <a:rPr lang="en-US" sz="1600" dirty="0"/>
-              <a:t> which can lead to inefficiencies when dealing with large datasets or when performing operations that are naturally columnar.</a:t>
-            </a:r>
-          </a:p>
-          <a:p>
-            <a:pPr marL="742950" lvl="1" indent="-285750">
-              <a:buFont typeface="+mj-lt"/>
-              <a:buAutoNum type="arabicPeriod"/>
-            </a:pPr>
-            <a:r>
-              <a:rPr lang="en-US" sz="1600" b="1" dirty="0"/>
-              <a:t>Polars</a:t>
-            </a:r>
-            <a:r>
-              <a:rPr lang="en-US" sz="1600" dirty="0"/>
-              <a:t>: Utilizes a columnar storage format, which is more efficient for many types of operations and is better for optimizing memory usage during computations.</a:t>
-            </a:r>
-          </a:p>
-          <a:p>
-            <a:pPr>
-              <a:buFont typeface="+mj-lt"/>
-              <a:buAutoNum type="arabicPeriod"/>
-            </a:pPr>
-            <a:r>
-              <a:rPr lang="en-US" sz="1600" b="1" dirty="0"/>
-              <a:t>Concurrency and Parallelism</a:t>
-            </a:r>
-            <a:r>
-              <a:rPr lang="en-US" sz="1600" dirty="0"/>
-              <a:t>:</a:t>
-            </a:r>
-          </a:p>
-          <a:p>
-            <a:pPr marL="742950" lvl="1" indent="-285750">
-              <a:buFont typeface="+mj-lt"/>
-              <a:buAutoNum type="arabicPeriod"/>
-            </a:pPr>
-            <a:r>
-              <a:rPr lang="en-US" sz="1600" b="1" dirty="0"/>
-              <a:t>Pandas</a:t>
-            </a:r>
-            <a:r>
-              <a:rPr lang="en-US" sz="1600" dirty="0"/>
-              <a:t>: Generally operates in a single-threaded manner, which means it does not naturally take advantage of multi-core CPUs without external tools like </a:t>
-            </a:r>
-            <a:r>
-              <a:rPr lang="en-US" sz="1600" dirty="0" err="1"/>
-              <a:t>Dask</a:t>
-            </a:r>
-            <a:r>
-              <a:rPr lang="en-US" sz="1600" dirty="0"/>
-              <a:t>.</a:t>
-            </a:r>
-          </a:p>
-          <a:p>
-            <a:pPr marL="742950" lvl="1" indent="-285750">
-              <a:buFont typeface="+mj-lt"/>
-              <a:buAutoNum type="arabicPeriod"/>
-            </a:pPr>
-            <a:r>
-              <a:rPr lang="en-US" sz="1600" b="1" dirty="0"/>
-              <a:t>Polars</a:t>
-            </a:r>
-            <a:r>
-              <a:rPr lang="en-US" sz="1600" dirty="0"/>
-              <a:t>: Built from the ground up to support multi-threading, allowing it to perform operations in parallel and thus significantly speeding up data processing tasks on multi-core machines.</a:t>
-            </a:r>
-          </a:p>
-          <a:p>
-            <a:pPr>
-              <a:buFont typeface="+mj-lt"/>
-              <a:buAutoNum type="arabicPeriod"/>
-            </a:pPr>
-            <a:r>
-              <a:rPr lang="en-US" sz="1600" b="1" dirty="0"/>
-              <a:t>Lazy Evaluation</a:t>
-            </a:r>
-            <a:r>
-              <a:rPr lang="en-US" sz="1600" dirty="0"/>
-              <a:t>:</a:t>
-            </a:r>
-          </a:p>
-          <a:p>
-            <a:pPr marL="742950" lvl="1" indent="-285750">
-              <a:buFont typeface="+mj-lt"/>
-              <a:buAutoNum type="arabicPeriod"/>
-            </a:pPr>
-            <a:r>
-              <a:rPr lang="en-US" sz="1600" b="1" dirty="0"/>
-              <a:t>Pandas</a:t>
-            </a:r>
-            <a:r>
-              <a:rPr lang="en-US" sz="1600" dirty="0"/>
-              <a:t>: Executes operations immediately when called, which can be inefficient in cases where multiple operations are chained together.</a:t>
-            </a:r>
-          </a:p>
-          <a:p>
-            <a:pPr marL="742950" lvl="1" indent="-285750">
-              <a:buFont typeface="+mj-lt"/>
-              <a:buAutoNum type="arabicPeriod"/>
-            </a:pPr>
-            <a:r>
-              <a:rPr lang="en-US" sz="1600" b="1" dirty="0"/>
-              <a:t>Polars</a:t>
-            </a:r>
-            <a:r>
-              <a:rPr lang="en-US" sz="1600" dirty="0"/>
-              <a:t>: Supports lazy evaluation where operations are not executed immediately but are optimized and executed only when needed. This can lead to better performance especially in complex data pipelines.</a:t>
-            </a:r>
-          </a:p>
-          <a:p>
-            <a:pPr>
-              <a:buFont typeface="+mj-lt"/>
-              <a:buAutoNum type="arabicPeriod"/>
-            </a:pPr>
-            <a:r>
-              <a:rPr lang="en-US" sz="1600" b="1" dirty="0"/>
-              <a:t>Memory Management</a:t>
-            </a:r>
-            <a:r>
-              <a:rPr lang="en-US" sz="1600" dirty="0"/>
-              <a:t>:</a:t>
-            </a:r>
-          </a:p>
-          <a:p>
-            <a:pPr marL="742950" lvl="1" indent="-285750">
-              <a:buFont typeface="+mj-lt"/>
-              <a:buAutoNum type="arabicPeriod"/>
-            </a:pPr>
-            <a:r>
-              <a:rPr lang="en-US" sz="1600" b="1" dirty="0"/>
-              <a:t>Pandas</a:t>
-            </a:r>
-            <a:r>
-              <a:rPr lang="en-US" sz="1600" dirty="0"/>
-              <a:t>: Can sometimes use memory inefficiently, particularly with operations that involve copying data.</a:t>
-            </a:r>
-          </a:p>
-          <a:p>
-            <a:pPr marL="742950" lvl="1" indent="-285750">
-              <a:buFont typeface="+mj-lt"/>
-              <a:buAutoNum type="arabicPeriod"/>
-            </a:pPr>
-            <a:r>
-              <a:rPr lang="en-US" sz="1600" b="1" dirty="0"/>
-              <a:t>Polars</a:t>
-            </a:r>
-            <a:r>
-              <a:rPr lang="en-US" sz="1600" dirty="0"/>
-              <a:t>: More efficient with memory due to its columnar approach and built-in optimizations that minimize unnecessary data duplication.</a:t>
-            </a:r>
-          </a:p>
-          <a:p>
-            <a:endParaRPr lang="en-US" dirty="0"/>
-          </a:p>
-        </p:txBody>
-      </p:sp>
-    </p:spTree>
-    <p:extLst>
-      <p:ext uri="{BB962C8B-B14F-4D97-AF65-F5344CB8AC3E}">
-        <p14:creationId xmlns:p14="http://schemas.microsoft.com/office/powerpoint/2010/main" val="3707181718"/>
-      </p:ext>
-    </p:extLst>
-  </p:cSld>
-  <p:clrMapOvr>
-    <a:masterClrMapping/>
-  </p:clrMapOvr>
-</p:sld>
-</file>
-
-<file path=ppt/slides/slide7.xml><?xml version="1.0" encoding="utf-8"?>
-<p:sld xmlns:a="http://schemas.openxmlformats.org/drawingml/2006/main" xmlns:r="http://schemas.openxmlformats.org/officeDocument/2006/relationships" xmlns:p="http://schemas.openxmlformats.org/presentationml/2006/main">
-  <p:cSld>
-    <p:spTree>
-      <p:nvGrpSpPr>
-        <p:cNvPr id="1" name=""/>
-        <p:cNvGrpSpPr/>
-        <p:nvPr/>
-      </p:nvGrpSpPr>
-      <p:grpSpPr>
-        <a:xfrm>
-          <a:off x="0" y="0"/>
-          <a:ext cx="0" cy="0"/>
-          <a:chOff x="0" y="0"/>
-          <a:chExt cx="0" cy="0"/>
-        </a:xfrm>
-      </p:grpSpPr>
-      <p:graphicFrame>
-        <p:nvGraphicFramePr>
-          <p:cNvPr id="4" name="think-cell data - do not delete" hidden="1">
-            <a:extLst>
-              <a:ext uri="{FF2B5EF4-FFF2-40B4-BE49-F238E27FC236}">
-                <a16:creationId xmlns:a16="http://schemas.microsoft.com/office/drawing/2014/main" id="{149FDA89-2BE7-F3B1-B947-20A4F2C245D8}"/>
-              </a:ext>
-            </a:extLst>
-          </p:cNvPr>
-          <p:cNvGraphicFramePr>
-            <a:graphicFrameLocks noChangeAspect="1"/>
-          </p:cNvGraphicFramePr>
-          <p:nvPr>
-            <p:custDataLst>
-              <p:tags r:id="rId1"/>
-            </p:custDataLst>
-            <p:extLst>
-              <p:ext uri="{D42A27DB-BD31-4B8C-83A1-F6EECF244321}">
-                <p14:modId xmlns:p14="http://schemas.microsoft.com/office/powerpoint/2010/main" val="753424000"/>
-              </p:ext>
-            </p:extLst>
-          </p:nvPr>
-        </p:nvGraphicFramePr>
-        <p:xfrm>
-          <a:off x="1588" y="1588"/>
-          <a:ext cx="1588" cy="1588"/>
-        </p:xfrm>
-        <a:graphic>
-          <a:graphicData uri="http://schemas.openxmlformats.org/presentationml/2006/ole">
-            <mc:AlternateContent xmlns:mc="http://schemas.openxmlformats.org/markup-compatibility/2006">
-              <mc:Choice xmlns:v="urn:schemas-microsoft-com:vml" Requires="v">
-                <p:oleObj name="think-cell Slide" r:id="rId3" imgW="606" imgH="608" progId="TCLayout.ActiveDocument.1">
-                  <p:embed/>
-                </p:oleObj>
-              </mc:Choice>
-              <mc:Fallback>
-                <p:oleObj name="think-cell Slide" r:id="rId3" imgW="606" imgH="608" progId="TCLayout.ActiveDocument.1">
-                  <p:embed/>
-                  <p:pic>
-                    <p:nvPicPr>
-                      <p:cNvPr id="0" name=""/>
-                      <p:cNvPicPr/>
-                      <p:nvPr/>
-                    </p:nvPicPr>
-                    <p:blipFill>
-                      <a:blip r:embed="rId4"/>
-                      <a:stretch>
-                        <a:fillRect/>
-                      </a:stretch>
-                    </p:blipFill>
-                    <p:spPr>
-                      <a:xfrm>
-                        <a:off x="1588" y="1588"/>
-                        <a:ext cx="1588" cy="1588"/>
-                      </a:xfrm>
-                      <a:prstGeom prst="rect">
-                        <a:avLst/>
-                      </a:prstGeom>
-                    </p:spPr>
-                  </p:pic>
-                </p:oleObj>
-              </mc:Fallback>
-            </mc:AlternateContent>
-          </a:graphicData>
-        </a:graphic>
-      </p:graphicFrame>
-      <p:sp>
-        <p:nvSpPr>
-          <p:cNvPr id="2" name="Title 1">
-            <a:extLst>
-              <a:ext uri="{FF2B5EF4-FFF2-40B4-BE49-F238E27FC236}">
                 <a16:creationId xmlns:a16="http://schemas.microsoft.com/office/drawing/2014/main" id="{60583AC9-21B1-202A-2DB7-BDDAC72FEFD8}"/>
               </a:ext>
             </a:extLst>
@@ -5122,388 +7252,25 @@
 </p:sld>
 </file>
 
-<file path=ppt/slides/slide8.xml><?xml version="1.0" encoding="utf-8"?>
-<p:sld xmlns:a="http://schemas.openxmlformats.org/drawingml/2006/main" xmlns:r="http://schemas.openxmlformats.org/officeDocument/2006/relationships" xmlns:p="http://schemas.openxmlformats.org/presentationml/2006/main">
-  <p:cSld>
-    <p:spTree>
-      <p:nvGrpSpPr>
-        <p:cNvPr id="1" name=""/>
-        <p:cNvGrpSpPr/>
-        <p:nvPr/>
-      </p:nvGrpSpPr>
-      <p:grpSpPr>
-        <a:xfrm>
-          <a:off x="0" y="0"/>
-          <a:ext cx="0" cy="0"/>
-          <a:chOff x="0" y="0"/>
-          <a:chExt cx="0" cy="0"/>
-        </a:xfrm>
-      </p:grpSpPr>
-      <p:graphicFrame>
-        <p:nvGraphicFramePr>
-          <p:cNvPr id="4" name="think-cell data - do not delete" hidden="1">
-            <a:extLst>
-              <a:ext uri="{FF2B5EF4-FFF2-40B4-BE49-F238E27FC236}">
-                <a16:creationId xmlns:a16="http://schemas.microsoft.com/office/drawing/2014/main" id="{0776722E-4520-005B-AD65-6922D22D49A0}"/>
-              </a:ext>
-            </a:extLst>
-          </p:cNvPr>
-          <p:cNvGraphicFramePr>
-            <a:graphicFrameLocks noChangeAspect="1"/>
-          </p:cNvGraphicFramePr>
-          <p:nvPr>
-            <p:custDataLst>
-              <p:tags r:id="rId1"/>
-            </p:custDataLst>
-            <p:extLst>
-              <p:ext uri="{D42A27DB-BD31-4B8C-83A1-F6EECF244321}">
-                <p14:modId xmlns:p14="http://schemas.microsoft.com/office/powerpoint/2010/main" val="4228134379"/>
-              </p:ext>
-            </p:extLst>
-          </p:nvPr>
-        </p:nvGraphicFramePr>
-        <p:xfrm>
-          <a:off x="1588" y="1588"/>
-          <a:ext cx="1588" cy="1588"/>
-        </p:xfrm>
-        <a:graphic>
-          <a:graphicData uri="http://schemas.openxmlformats.org/presentationml/2006/ole">
-            <mc:AlternateContent xmlns:mc="http://schemas.openxmlformats.org/markup-compatibility/2006">
-              <mc:Choice xmlns:v="urn:schemas-microsoft-com:vml" Requires="v">
-                <p:oleObj name="think-cell Slide" r:id="rId3" imgW="606" imgH="608" progId="TCLayout.ActiveDocument.1">
-                  <p:embed/>
-                </p:oleObj>
-              </mc:Choice>
-              <mc:Fallback>
-                <p:oleObj name="think-cell Slide" r:id="rId3" imgW="606" imgH="608" progId="TCLayout.ActiveDocument.1">
-                  <p:embed/>
-                  <p:pic>
-                    <p:nvPicPr>
-                      <p:cNvPr id="0" name=""/>
-                      <p:cNvPicPr/>
-                      <p:nvPr/>
-                    </p:nvPicPr>
-                    <p:blipFill>
-                      <a:blip r:embed="rId4"/>
-                      <a:stretch>
-                        <a:fillRect/>
-                      </a:stretch>
-                    </p:blipFill>
-                    <p:spPr>
-                      <a:xfrm>
-                        <a:off x="1588" y="1588"/>
-                        <a:ext cx="1588" cy="1588"/>
-                      </a:xfrm>
-                      <a:prstGeom prst="rect">
-                        <a:avLst/>
-                      </a:prstGeom>
-                    </p:spPr>
-                  </p:pic>
-                </p:oleObj>
-              </mc:Fallback>
-            </mc:AlternateContent>
-          </a:graphicData>
-        </a:graphic>
-      </p:graphicFrame>
-      <p:sp>
-        <p:nvSpPr>
-          <p:cNvPr id="2" name="Title 1">
-            <a:extLst>
-              <a:ext uri="{FF2B5EF4-FFF2-40B4-BE49-F238E27FC236}">
-                <a16:creationId xmlns:a16="http://schemas.microsoft.com/office/drawing/2014/main" id="{3D39B0E1-E603-018C-0D3C-2E95504C8543}"/>
-              </a:ext>
-            </a:extLst>
-          </p:cNvPr>
-          <p:cNvSpPr>
-            <a:spLocks noGrp="1"/>
-          </p:cNvSpPr>
-          <p:nvPr>
-            <p:ph type="title"/>
-          </p:nvPr>
-        </p:nvSpPr>
-        <p:spPr/>
-        <p:txBody>
-          <a:bodyPr vert="horz"/>
-          <a:lstStyle/>
-          <a:p>
-            <a:r>
-              <a:rPr lang="en-US" dirty="0" err="1"/>
-              <a:t>Apendix</a:t>
-            </a:r>
-            <a:endParaRPr lang="en-US" dirty="0"/>
-          </a:p>
-        </p:txBody>
-      </p:sp>
-      <p:sp>
-        <p:nvSpPr>
-          <p:cNvPr id="3" name="Content Placeholder 2">
-            <a:extLst>
-              <a:ext uri="{FF2B5EF4-FFF2-40B4-BE49-F238E27FC236}">
-                <a16:creationId xmlns:a16="http://schemas.microsoft.com/office/drawing/2014/main" id="{331EECA9-D296-06AA-7613-7B9B00ECF7D1}"/>
-              </a:ext>
-            </a:extLst>
-          </p:cNvPr>
-          <p:cNvSpPr>
-            <a:spLocks noGrp="1"/>
-          </p:cNvSpPr>
-          <p:nvPr>
-            <p:ph idx="1"/>
-          </p:nvPr>
-        </p:nvSpPr>
-        <p:spPr/>
-        <p:txBody>
-          <a:bodyPr>
-            <a:normAutofit/>
-          </a:bodyPr>
-          <a:lstStyle/>
-          <a:p>
-            <a:r>
-              <a:rPr lang="en-US" sz="1800" dirty="0"/>
-              <a:t>The goal of Polars is to provide a lightning fast </a:t>
-            </a:r>
-            <a:r>
-              <a:rPr lang="en-US" sz="1800" dirty="0" err="1"/>
-              <a:t>DataFrame</a:t>
-            </a:r>
-            <a:r>
-              <a:rPr lang="en-US" sz="1800" dirty="0"/>
-              <a:t> library that:</a:t>
-            </a:r>
-          </a:p>
-          <a:p>
-            <a:endParaRPr lang="en-US" sz="1800" dirty="0"/>
-          </a:p>
-          <a:p>
-            <a:r>
-              <a:rPr lang="en-US" sz="1800" dirty="0"/>
-              <a:t>Utilizes all available cores on your machine.</a:t>
-            </a:r>
-          </a:p>
-          <a:p>
-            <a:r>
-              <a:rPr lang="en-US" sz="1800" dirty="0"/>
-              <a:t>Optimizes queries to reduce unneeded work/memory allocations.</a:t>
-            </a:r>
-          </a:p>
-          <a:p>
-            <a:r>
-              <a:rPr lang="en-US" sz="1800" dirty="0"/>
-              <a:t>Handles datasets much larger than your available RAM.</a:t>
-            </a:r>
-          </a:p>
-          <a:p>
-            <a:r>
-              <a:rPr lang="en-US" sz="1800" dirty="0"/>
-              <a:t>A consistent and predictable API.</a:t>
-            </a:r>
-          </a:p>
-          <a:p>
-            <a:r>
-              <a:rPr lang="en-US" sz="1800" dirty="0"/>
-              <a:t>Adheres to a strict schema (data-types should be known before running the query).</a:t>
-            </a:r>
-          </a:p>
-          <a:p>
-            <a:r>
-              <a:rPr lang="en-US" sz="1800" dirty="0"/>
-              <a:t>Polars is written in Rust which gives it C/C++ performance and allows it to fully control performance-critical parts in a query engine.</a:t>
-            </a:r>
-          </a:p>
-        </p:txBody>
-      </p:sp>
-    </p:spTree>
-    <p:extLst>
-      <p:ext uri="{BB962C8B-B14F-4D97-AF65-F5344CB8AC3E}">
-        <p14:creationId xmlns:p14="http://schemas.microsoft.com/office/powerpoint/2010/main" val="1243977546"/>
-      </p:ext>
-    </p:extLst>
-  </p:cSld>
-  <p:clrMapOvr>
-    <a:masterClrMapping/>
-  </p:clrMapOvr>
-</p:sld>
+<file path=ppt/tags/tag1.xml><?xml version="1.0" encoding="utf-8"?>
+<p:tagLst xmlns:a="http://schemas.openxmlformats.org/drawingml/2006/main" xmlns:r="http://schemas.openxmlformats.org/officeDocument/2006/relationships" xmlns:p="http://schemas.openxmlformats.org/presentationml/2006/main">
+  <p:tag name="THINKCELLSHAPEDONOTDELETE" val="thinkcellActiveDocDoNotDelete"/>
+</p:tagLst>
 </file>
 
-<file path=ppt/slides/slide9.xml><?xml version="1.0" encoding="utf-8"?>
-<p:sld xmlns:a="http://schemas.openxmlformats.org/drawingml/2006/main" xmlns:r="http://schemas.openxmlformats.org/officeDocument/2006/relationships" xmlns:p="http://schemas.openxmlformats.org/presentationml/2006/main">
-  <p:cSld>
-    <p:spTree>
-      <p:nvGrpSpPr>
-        <p:cNvPr id="1" name=""/>
-        <p:cNvGrpSpPr/>
-        <p:nvPr/>
-      </p:nvGrpSpPr>
-      <p:grpSpPr>
-        <a:xfrm>
-          <a:off x="0" y="0"/>
-          <a:ext cx="0" cy="0"/>
-          <a:chOff x="0" y="0"/>
-          <a:chExt cx="0" cy="0"/>
-        </a:xfrm>
-      </p:grpSpPr>
-      <p:graphicFrame>
-        <p:nvGraphicFramePr>
-          <p:cNvPr id="4" name="think-cell data - do not delete" hidden="1">
-            <a:extLst>
-              <a:ext uri="{FF2B5EF4-FFF2-40B4-BE49-F238E27FC236}">
-                <a16:creationId xmlns:a16="http://schemas.microsoft.com/office/drawing/2014/main" id="{053277D1-7881-6E61-3B36-DAEFA1678460}"/>
-              </a:ext>
-            </a:extLst>
-          </p:cNvPr>
-          <p:cNvGraphicFramePr>
-            <a:graphicFrameLocks noChangeAspect="1"/>
-          </p:cNvGraphicFramePr>
-          <p:nvPr>
-            <p:custDataLst>
-              <p:tags r:id="rId1"/>
-            </p:custDataLst>
-            <p:extLst>
-              <p:ext uri="{D42A27DB-BD31-4B8C-83A1-F6EECF244321}">
-                <p14:modId xmlns:p14="http://schemas.microsoft.com/office/powerpoint/2010/main" val="855969851"/>
-              </p:ext>
-            </p:extLst>
-          </p:nvPr>
-        </p:nvGraphicFramePr>
-        <p:xfrm>
-          <a:off x="1588" y="1588"/>
-          <a:ext cx="1588" cy="1588"/>
-        </p:xfrm>
-        <a:graphic>
-          <a:graphicData uri="http://schemas.openxmlformats.org/presentationml/2006/ole">
-            <mc:AlternateContent xmlns:mc="http://schemas.openxmlformats.org/markup-compatibility/2006">
-              <mc:Choice xmlns:v="urn:schemas-microsoft-com:vml" Requires="v">
-                <p:oleObj name="think-cell Slide" r:id="rId3" imgW="606" imgH="608" progId="TCLayout.ActiveDocument.1">
-                  <p:embed/>
-                </p:oleObj>
-              </mc:Choice>
-              <mc:Fallback>
-                <p:oleObj name="think-cell Slide" r:id="rId3" imgW="606" imgH="608" progId="TCLayout.ActiveDocument.1">
-                  <p:embed/>
-                  <p:pic>
-                    <p:nvPicPr>
-                      <p:cNvPr id="0" name=""/>
-                      <p:cNvPicPr/>
-                      <p:nvPr/>
-                    </p:nvPicPr>
-                    <p:blipFill>
-                      <a:blip r:embed="rId4"/>
-                      <a:stretch>
-                        <a:fillRect/>
-                      </a:stretch>
-                    </p:blipFill>
-                    <p:spPr>
-                      <a:xfrm>
-                        <a:off x="1588" y="1588"/>
-                        <a:ext cx="1588" cy="1588"/>
-                      </a:xfrm>
-                      <a:prstGeom prst="rect">
-                        <a:avLst/>
-                      </a:prstGeom>
-                    </p:spPr>
-                  </p:pic>
-                </p:oleObj>
-              </mc:Fallback>
-            </mc:AlternateContent>
-          </a:graphicData>
-        </a:graphic>
-      </p:graphicFrame>
-      <p:sp>
-        <p:nvSpPr>
-          <p:cNvPr id="2" name="Title 1">
-            <a:extLst>
-              <a:ext uri="{FF2B5EF4-FFF2-40B4-BE49-F238E27FC236}">
-                <a16:creationId xmlns:a16="http://schemas.microsoft.com/office/drawing/2014/main" id="{11A05D04-8075-8131-1AF9-42A295DB0A84}"/>
-              </a:ext>
-            </a:extLst>
-          </p:cNvPr>
-          <p:cNvSpPr>
-            <a:spLocks noGrp="1"/>
-          </p:cNvSpPr>
-          <p:nvPr>
-            <p:ph type="title"/>
-          </p:nvPr>
-        </p:nvSpPr>
-        <p:spPr/>
-        <p:txBody>
-          <a:bodyPr vert="horz"/>
-          <a:lstStyle/>
-          <a:p>
-            <a:r>
-              <a:rPr lang="en-US" dirty="0"/>
-              <a:t>References</a:t>
-            </a:r>
-          </a:p>
-        </p:txBody>
-      </p:sp>
-      <p:sp>
-        <p:nvSpPr>
-          <p:cNvPr id="3" name="Content Placeholder 2">
-            <a:extLst>
-              <a:ext uri="{FF2B5EF4-FFF2-40B4-BE49-F238E27FC236}">
-                <a16:creationId xmlns:a16="http://schemas.microsoft.com/office/drawing/2014/main" id="{4AF5C313-C931-148A-01B7-C1B7651B8FFF}"/>
-              </a:ext>
-            </a:extLst>
-          </p:cNvPr>
-          <p:cNvSpPr>
-            <a:spLocks noGrp="1"/>
-          </p:cNvSpPr>
-          <p:nvPr>
-            <p:ph idx="1"/>
-          </p:nvPr>
-        </p:nvSpPr>
-        <p:spPr/>
-        <p:txBody>
-          <a:bodyPr/>
-          <a:lstStyle/>
-          <a:p>
-            <a:r>
-              <a:rPr lang="en-US" dirty="0">
-                <a:hlinkClick r:id="rId5"/>
-              </a:rPr>
-              <a:t>https://docs.pola.rs/#key-features</a:t>
-            </a:r>
-            <a:endParaRPr lang="en-US" dirty="0"/>
-          </a:p>
-          <a:p>
-            <a:r>
-              <a:rPr lang="en-US" dirty="0">
-                <a:hlinkClick r:id="rId6"/>
-              </a:rPr>
-              <a:t>https://realpython.com/polars-python/</a:t>
-            </a:r>
-            <a:endParaRPr lang="en-US" dirty="0"/>
-          </a:p>
-          <a:p>
-            <a:r>
-              <a:rPr lang="en-US" dirty="0">
-                <a:hlinkClick r:id="rId7"/>
-              </a:rPr>
-              <a:t>https://cliffy-gardens.medium.com/using-python-polars-my-late-2024-review-da806618a102</a:t>
-            </a:r>
-            <a:endParaRPr lang="en-US" dirty="0"/>
-          </a:p>
-          <a:p>
-            <a:endParaRPr lang="en-US" dirty="0"/>
-          </a:p>
-          <a:p>
-            <a:endParaRPr lang="en-US" dirty="0"/>
-          </a:p>
-        </p:txBody>
-      </p:sp>
-    </p:spTree>
-    <p:extLst>
-      <p:ext uri="{BB962C8B-B14F-4D97-AF65-F5344CB8AC3E}">
-        <p14:creationId xmlns:p14="http://schemas.microsoft.com/office/powerpoint/2010/main" val="4048664199"/>
-      </p:ext>
-    </p:extLst>
-  </p:cSld>
-  <p:clrMapOvr>
-    <a:masterClrMapping/>
-  </p:clrMapOvr>
-</p:sld>
+<file path=ppt/tags/tag10.xml><?xml version="1.0" encoding="utf-8"?>
+<p:tagLst xmlns:a="http://schemas.openxmlformats.org/drawingml/2006/main" xmlns:r="http://schemas.openxmlformats.org/officeDocument/2006/relationships" xmlns:p="http://schemas.openxmlformats.org/presentationml/2006/main">
+  <p:tag name="THINKCELLSHAPEDONOTDELETE" val="thinkcellActiveDocDoNotDelete"/>
+</p:tagLst>
 </file>
 
-<file path=ppt/tags/tag1.xml><?xml version="1.0" encoding="utf-8"?>
+<file path=ppt/tags/tag11.xml><?xml version="1.0" encoding="utf-8"?>
+<p:tagLst xmlns:a="http://schemas.openxmlformats.org/drawingml/2006/main" xmlns:r="http://schemas.openxmlformats.org/officeDocument/2006/relationships" xmlns:p="http://schemas.openxmlformats.org/presentationml/2006/main">
+  <p:tag name="THINKCELLSHAPEDONOTDELETE" val="thinkcellActiveDocDoNotDelete"/>
+</p:tagLst>
+</file>
+
+<file path=ppt/tags/tag12.xml><?xml version="1.0" encoding="utf-8"?>
 <p:tagLst xmlns:a="http://schemas.openxmlformats.org/drawingml/2006/main" xmlns:r="http://schemas.openxmlformats.org/officeDocument/2006/relationships" xmlns:p="http://schemas.openxmlformats.org/presentationml/2006/main">
   <p:tag name="THINKCELLSHAPEDONOTDELETE" val="thinkcellActiveDocDoNotDelete"/>
 </p:tagLst>
@@ -5870,4 +7637,319 @@
     </a:ext>
   </a:extLst>
 </a:theme>
+</file>
+
+<file path=ppt/theme/theme2.xml><?xml version="1.0" encoding="utf-8"?>
+<a:theme xmlns:a="http://schemas.openxmlformats.org/drawingml/2006/main" name="Office Theme">
+  <a:themeElements>
+    <a:clrScheme name="Office">
+      <a:dk1>
+        <a:sysClr val="windowText" lastClr="000000"/>
+      </a:dk1>
+      <a:lt1>
+        <a:sysClr val="window" lastClr="FFFFFF"/>
+      </a:lt1>
+      <a:dk2>
+        <a:srgbClr val="0E2841"/>
+      </a:dk2>
+      <a:lt2>
+        <a:srgbClr val="E8E8E8"/>
+      </a:lt2>
+      <a:accent1>
+        <a:srgbClr val="156082"/>
+      </a:accent1>
+      <a:accent2>
+        <a:srgbClr val="E97132"/>
+      </a:accent2>
+      <a:accent3>
+        <a:srgbClr val="196B24"/>
+      </a:accent3>
+      <a:accent4>
+        <a:srgbClr val="0F9ED5"/>
+      </a:accent4>
+      <a:accent5>
+        <a:srgbClr val="A02B93"/>
+      </a:accent5>
+      <a:accent6>
+        <a:srgbClr val="4EA72E"/>
+      </a:accent6>
+      <a:hlink>
+        <a:srgbClr val="467886"/>
+      </a:hlink>
+      <a:folHlink>
+        <a:srgbClr val="96607D"/>
+      </a:folHlink>
+    </a:clrScheme>
+    <a:fontScheme name="Office">
+      <a:majorFont>
+        <a:latin typeface="Aptos Display" panose="02110004020202020204"/>
+        <a:ea typeface=""/>
+        <a:cs typeface=""/>
+        <a:font script="Jpan" typeface="游ゴシック Light"/>
+        <a:font script="Hang" typeface="맑은 고딕"/>
+        <a:font script="Hans" typeface="等线 Light"/>
+        <a:font script="Hant" typeface="新細明體"/>
+        <a:font script="Arab" typeface="Times New Roman"/>
+        <a:font script="Hebr" typeface="Times New Roman"/>
+        <a:font script="Thai" typeface="Angsana New"/>
+        <a:font script="Ethi" typeface="Nyala"/>
+        <a:font script="Beng" typeface="Vrinda"/>
+        <a:font script="Gujr" typeface="Shruti"/>
+        <a:font script="Khmr" typeface="MoolBoran"/>
+        <a:font script="Knda" typeface="Tunga"/>
+        <a:font script="Guru" typeface="Raavi"/>
+        <a:font script="Cans" typeface="Euphemia"/>
+        <a:font script="Cher" typeface="Plantagenet Cherokee"/>
+        <a:font script="Yiii" typeface="Microsoft Yi Baiti"/>
+        <a:font script="Tibt" typeface="Microsoft Himalaya"/>
+        <a:font script="Thaa" typeface="MV Boli"/>
+        <a:font script="Deva" typeface="Mangal"/>
+        <a:font script="Telu" typeface="Gautami"/>
+        <a:font script="Taml" typeface="Latha"/>
+        <a:font script="Syrc" typeface="Estrangelo Edessa"/>
+        <a:font script="Orya" typeface="Kalinga"/>
+        <a:font script="Mlym" typeface="Kartika"/>
+        <a:font script="Laoo" typeface="DokChampa"/>
+        <a:font script="Sinh" typeface="Iskoola Pota"/>
+        <a:font script="Mong" typeface="Mongolian Baiti"/>
+        <a:font script="Viet" typeface="Times New Roman"/>
+        <a:font script="Uigh" typeface="Microsoft Uighur"/>
+        <a:font script="Geor" typeface="Sylfaen"/>
+        <a:font script="Armn" typeface="Arial"/>
+        <a:font script="Bugi" typeface="Leelawadee UI"/>
+        <a:font script="Bopo" typeface="Microsoft JhengHei"/>
+        <a:font script="Java" typeface="Javanese Text"/>
+        <a:font script="Lisu" typeface="Segoe UI"/>
+        <a:font script="Mymr" typeface="Myanmar Text"/>
+        <a:font script="Nkoo" typeface="Ebrima"/>
+        <a:font script="Olck" typeface="Nirmala UI"/>
+        <a:font script="Osma" typeface="Ebrima"/>
+        <a:font script="Phag" typeface="Phagspa"/>
+        <a:font script="Syrn" typeface="Estrangelo Edessa"/>
+        <a:font script="Syrj" typeface="Estrangelo Edessa"/>
+        <a:font script="Syre" typeface="Estrangelo Edessa"/>
+        <a:font script="Sora" typeface="Nirmala UI"/>
+        <a:font script="Tale" typeface="Microsoft Tai Le"/>
+        <a:font script="Talu" typeface="Microsoft New Tai Lue"/>
+        <a:font script="Tfng" typeface="Ebrima"/>
+      </a:majorFont>
+      <a:minorFont>
+        <a:latin typeface="Aptos" panose="02110004020202020204"/>
+        <a:ea typeface=""/>
+        <a:cs typeface=""/>
+        <a:font script="Jpan" typeface="游ゴシック"/>
+        <a:font script="Hang" typeface="맑은 고딕"/>
+        <a:font script="Hans" typeface="等线"/>
+        <a:font script="Hant" typeface="新細明體"/>
+        <a:font script="Arab" typeface="Arial"/>
+        <a:font script="Hebr" typeface="Arial"/>
+        <a:font script="Thai" typeface="Cordia New"/>
+        <a:font script="Ethi" typeface="Nyala"/>
+        <a:font script="Beng" typeface="Vrinda"/>
+        <a:font script="Gujr" typeface="Shruti"/>
+        <a:font script="Khmr" typeface="DaunPenh"/>
+        <a:font script="Knda" typeface="Tunga"/>
+        <a:font script="Guru" typeface="Raavi"/>
+        <a:font script="Cans" typeface="Euphemia"/>
+        <a:font script="Cher" typeface="Plantagenet Cherokee"/>
+        <a:font script="Yiii" typeface="Microsoft Yi Baiti"/>
+        <a:font script="Tibt" typeface="Microsoft Himalaya"/>
+        <a:font script="Thaa" typeface="MV Boli"/>
+        <a:font script="Deva" typeface="Mangal"/>
+        <a:font script="Telu" typeface="Gautami"/>
+        <a:font script="Taml" typeface="Latha"/>
+        <a:font script="Syrc" typeface="Estrangelo Edessa"/>
+        <a:font script="Orya" typeface="Kalinga"/>
+        <a:font script="Mlym" typeface="Kartika"/>
+        <a:font script="Laoo" typeface="DokChampa"/>
+        <a:font script="Sinh" typeface="Iskoola Pota"/>
+        <a:font script="Mong" typeface="Mongolian Baiti"/>
+        <a:font script="Viet" typeface="Arial"/>
+        <a:font script="Uigh" typeface="Microsoft Uighur"/>
+        <a:font script="Geor" typeface="Sylfaen"/>
+        <a:font script="Armn" typeface="Arial"/>
+        <a:font script="Bugi" typeface="Leelawadee UI"/>
+        <a:font script="Bopo" typeface="Microsoft JhengHei"/>
+        <a:font script="Java" typeface="Javanese Text"/>
+        <a:font script="Lisu" typeface="Segoe UI"/>
+        <a:font script="Mymr" typeface="Myanmar Text"/>
+        <a:font script="Nkoo" typeface="Ebrima"/>
+        <a:font script="Olck" typeface="Nirmala UI"/>
+        <a:font script="Osma" typeface="Ebrima"/>
+        <a:font script="Phag" typeface="Phagspa"/>
+        <a:font script="Syrn" typeface="Estrangelo Edessa"/>
+        <a:font script="Syrj" typeface="Estrangelo Edessa"/>
+        <a:font script="Syre" typeface="Estrangelo Edessa"/>
+        <a:font script="Sora" typeface="Nirmala UI"/>
+        <a:font script="Tale" typeface="Microsoft Tai Le"/>
+        <a:font script="Talu" typeface="Microsoft New Tai Lue"/>
+        <a:font script="Tfng" typeface="Ebrima"/>
+      </a:minorFont>
+    </a:fontScheme>
+    <a:fmtScheme name="Office">
+      <a:fillStyleLst>
+        <a:solidFill>
+          <a:schemeClr val="phClr"/>
+        </a:solidFill>
+        <a:gradFill rotWithShape="1">
+          <a:gsLst>
+            <a:gs pos="0">
+              <a:schemeClr val="phClr">
+                <a:lumMod val="110000"/>
+                <a:satMod val="105000"/>
+                <a:tint val="67000"/>
+              </a:schemeClr>
+            </a:gs>
+            <a:gs pos="50000">
+              <a:schemeClr val="phClr">
+                <a:lumMod val="105000"/>
+                <a:satMod val="103000"/>
+                <a:tint val="73000"/>
+              </a:schemeClr>
+            </a:gs>
+            <a:gs pos="100000">
+              <a:schemeClr val="phClr">
+                <a:lumMod val="105000"/>
+                <a:satMod val="109000"/>
+                <a:tint val="81000"/>
+              </a:schemeClr>
+            </a:gs>
+          </a:gsLst>
+          <a:lin ang="5400000" scaled="0"/>
+        </a:gradFill>
+        <a:gradFill rotWithShape="1">
+          <a:gsLst>
+            <a:gs pos="0">
+              <a:schemeClr val="phClr">
+                <a:satMod val="103000"/>
+                <a:lumMod val="102000"/>
+                <a:tint val="94000"/>
+              </a:schemeClr>
+            </a:gs>
+            <a:gs pos="50000">
+              <a:schemeClr val="phClr">
+                <a:satMod val="110000"/>
+                <a:lumMod val="100000"/>
+                <a:shade val="100000"/>
+              </a:schemeClr>
+            </a:gs>
+            <a:gs pos="100000">
+              <a:schemeClr val="phClr">
+                <a:lumMod val="99000"/>
+                <a:satMod val="120000"/>
+                <a:shade val="78000"/>
+              </a:schemeClr>
+            </a:gs>
+          </a:gsLst>
+          <a:lin ang="5400000" scaled="0"/>
+        </a:gradFill>
+      </a:fillStyleLst>
+      <a:lnStyleLst>
+        <a:ln w="12700" cap="flat" cmpd="sng" algn="ctr">
+          <a:solidFill>
+            <a:schemeClr val="phClr"/>
+          </a:solidFill>
+          <a:prstDash val="solid"/>
+          <a:miter lim="800000"/>
+        </a:ln>
+        <a:ln w="19050" cap="flat" cmpd="sng" algn="ctr">
+          <a:solidFill>
+            <a:schemeClr val="phClr"/>
+          </a:solidFill>
+          <a:prstDash val="solid"/>
+          <a:miter lim="800000"/>
+        </a:ln>
+        <a:ln w="25400" cap="flat" cmpd="sng" algn="ctr">
+          <a:solidFill>
+            <a:schemeClr val="phClr"/>
+          </a:solidFill>
+          <a:prstDash val="solid"/>
+          <a:miter lim="800000"/>
+        </a:ln>
+      </a:lnStyleLst>
+      <a:effectStyleLst>
+        <a:effectStyle>
+          <a:effectLst/>
+        </a:effectStyle>
+        <a:effectStyle>
+          <a:effectLst/>
+        </a:effectStyle>
+        <a:effectStyle>
+          <a:effectLst>
+            <a:outerShdw blurRad="57150" dist="19050" dir="5400000" algn="ctr" rotWithShape="0">
+              <a:srgbClr val="000000">
+                <a:alpha val="63000"/>
+              </a:srgbClr>
+            </a:outerShdw>
+          </a:effectLst>
+        </a:effectStyle>
+      </a:effectStyleLst>
+      <a:bgFillStyleLst>
+        <a:solidFill>
+          <a:schemeClr val="phClr"/>
+        </a:solidFill>
+        <a:solidFill>
+          <a:schemeClr val="phClr">
+            <a:tint val="95000"/>
+            <a:satMod val="170000"/>
+          </a:schemeClr>
+        </a:solidFill>
+        <a:gradFill rotWithShape="1">
+          <a:gsLst>
+            <a:gs pos="0">
+              <a:schemeClr val="phClr">
+                <a:tint val="93000"/>
+                <a:satMod val="150000"/>
+                <a:shade val="98000"/>
+                <a:lumMod val="102000"/>
+              </a:schemeClr>
+            </a:gs>
+            <a:gs pos="50000">
+              <a:schemeClr val="phClr">
+                <a:tint val="98000"/>
+                <a:satMod val="130000"/>
+                <a:shade val="90000"/>
+                <a:lumMod val="103000"/>
+              </a:schemeClr>
+            </a:gs>
+            <a:gs pos="100000">
+              <a:schemeClr val="phClr">
+                <a:shade val="63000"/>
+                <a:satMod val="120000"/>
+              </a:schemeClr>
+            </a:gs>
+          </a:gsLst>
+          <a:lin ang="5400000" scaled="0"/>
+        </a:gradFill>
+      </a:bgFillStyleLst>
+    </a:fmtScheme>
+  </a:themeElements>
+  <a:objectDefaults>
+    <a:lnDef>
+      <a:spPr/>
+      <a:bodyPr/>
+      <a:lstStyle/>
+      <a:style>
+        <a:lnRef idx="2">
+          <a:schemeClr val="accent1"/>
+        </a:lnRef>
+        <a:fillRef idx="0">
+          <a:schemeClr val="accent1"/>
+        </a:fillRef>
+        <a:effectRef idx="1">
+          <a:schemeClr val="accent1"/>
+        </a:effectRef>
+        <a:fontRef idx="minor">
+          <a:schemeClr val="tx1"/>
+        </a:fontRef>
+      </a:style>
+    </a:lnDef>
+  </a:objectDefaults>
+  <a:extraClrSchemeLst/>
+  <a:extLst>
+    <a:ext uri="{05A4C25C-085E-4340-85A3-A5531E510DB2}">
+      <thm15:themeFamily xmlns:thm15="http://schemas.microsoft.com/office/thememl/2012/main" name="Office Theme" id="{2E142A2C-CD16-42D6-873A-C26D2A0506FA}" vid="{1BDDFF52-6CD6-40A5-AB3C-68EB2F1E4D0A}"/>
+    </a:ext>
+  </a:extLst>
+</a:theme>
 </file>